--- a/Materjalid/Day15 Github/github-desktop-esitlus.pptx
+++ b/Materjalid/Day15 Github/github-desktop-esitlus.pptx
@@ -5,7 +5,7 @@
     <p:sldMasterId id="2147483648" r:id="rId1"/>
   </p:sldMasterIdLst>
   <p:notesMasterIdLst>
-    <p:notesMasterId r:id="rId16"/>
+    <p:notesMasterId r:id="rId18"/>
   </p:notesMasterIdLst>
   <p:sldIdLst>
     <p:sldId id="479" r:id="rId2"/>
@@ -22,6 +22,8 @@
     <p:sldId id="486" r:id="rId13"/>
     <p:sldId id="487" r:id="rId14"/>
     <p:sldId id="489" r:id="rId15"/>
+    <p:sldId id="490" r:id="rId16"/>
+    <p:sldId id="491" r:id="rId17"/>
   </p:sldIdLst>
   <p:sldSz cx="12192000" cy="6858000"/>
   <p:notesSz cx="6858000" cy="9144000"/>
@@ -265,7 +267,7 @@
           <a:p>
             <a:fld id="{D6E941F6-9D8D-4A15-9C93-1C66F398C183}" type="datetimeFigureOut">
               <a:rPr lang="en-GB" smtClean="0"/>
-              <a:t>17/09/2026</a:t>
+              <a:t>18/09/2026</a:t>
             </a:fld>
             <a:endParaRPr lang="en-GB"/>
           </a:p>
@@ -1598,7 +1600,7 @@
           <a:p>
             <a:fld id="{5BCAD085-E8A6-8845-BD4E-CB4CCA059FC4}" type="datetimeFigureOut">
               <a:rPr lang="en-US" smtClean="0"/>
-              <a:t>9/17/2026</a:t>
+              <a:t>9/18/2026</a:t>
             </a:fld>
             <a:endParaRPr lang="en-US"/>
           </a:p>
@@ -1766,7 +1768,7 @@
           <a:p>
             <a:fld id="{5BCAD085-E8A6-8845-BD4E-CB4CCA059FC4}" type="datetimeFigureOut">
               <a:rPr lang="en-US" smtClean="0"/>
-              <a:t>9/17/2026</a:t>
+              <a:t>9/18/2026</a:t>
             </a:fld>
             <a:endParaRPr lang="en-US"/>
           </a:p>
@@ -1944,7 +1946,7 @@
           <a:p>
             <a:fld id="{5BCAD085-E8A6-8845-BD4E-CB4CCA059FC4}" type="datetimeFigureOut">
               <a:rPr lang="en-US" smtClean="0"/>
-              <a:t>9/17/2026</a:t>
+              <a:t>9/18/2026</a:t>
             </a:fld>
             <a:endParaRPr lang="en-US"/>
           </a:p>
@@ -2844,7 +2846,7 @@
           <a:p>
             <a:fld id="{5BCAD085-E8A6-8845-BD4E-CB4CCA059FC4}" type="datetimeFigureOut">
               <a:rPr lang="en-US" smtClean="0"/>
-              <a:t>9/17/2026</a:t>
+              <a:t>9/18/2026</a:t>
             </a:fld>
             <a:endParaRPr lang="en-US"/>
           </a:p>
@@ -3089,7 +3091,7 @@
           <a:p>
             <a:fld id="{5BCAD085-E8A6-8845-BD4E-CB4CCA059FC4}" type="datetimeFigureOut">
               <a:rPr lang="en-US" smtClean="0"/>
-              <a:t>9/17/2026</a:t>
+              <a:t>9/18/2026</a:t>
             </a:fld>
             <a:endParaRPr lang="en-US"/>
           </a:p>
@@ -3374,7 +3376,7 @@
           <a:p>
             <a:fld id="{5BCAD085-E8A6-8845-BD4E-CB4CCA059FC4}" type="datetimeFigureOut">
               <a:rPr lang="en-US" smtClean="0"/>
-              <a:t>9/17/2026</a:t>
+              <a:t>9/18/2026</a:t>
             </a:fld>
             <a:endParaRPr lang="en-US"/>
           </a:p>
@@ -3793,7 +3795,7 @@
           <a:p>
             <a:fld id="{5BCAD085-E8A6-8845-BD4E-CB4CCA059FC4}" type="datetimeFigureOut">
               <a:rPr lang="en-US" smtClean="0"/>
-              <a:t>9/17/2026</a:t>
+              <a:t>9/18/2026</a:t>
             </a:fld>
             <a:endParaRPr lang="en-US"/>
           </a:p>
@@ -3910,7 +3912,7 @@
           <a:p>
             <a:fld id="{5BCAD085-E8A6-8845-BD4E-CB4CCA059FC4}" type="datetimeFigureOut">
               <a:rPr lang="en-US" smtClean="0"/>
-              <a:t>9/17/2026</a:t>
+              <a:t>9/18/2026</a:t>
             </a:fld>
             <a:endParaRPr lang="en-US"/>
           </a:p>
@@ -4005,7 +4007,7 @@
           <a:p>
             <a:fld id="{5BCAD085-E8A6-8845-BD4E-CB4CCA059FC4}" type="datetimeFigureOut">
               <a:rPr lang="en-US" smtClean="0"/>
-              <a:t>9/17/2026</a:t>
+              <a:t>9/18/2026</a:t>
             </a:fld>
             <a:endParaRPr lang="en-US"/>
           </a:p>
@@ -4280,7 +4282,7 @@
           <a:p>
             <a:fld id="{5BCAD085-E8A6-8845-BD4E-CB4CCA059FC4}" type="datetimeFigureOut">
               <a:rPr lang="en-US" smtClean="0"/>
-              <a:t>9/17/2026</a:t>
+              <a:t>9/18/2026</a:t>
             </a:fld>
             <a:endParaRPr lang="en-US"/>
           </a:p>
@@ -4532,7 +4534,7 @@
           <a:p>
             <a:fld id="{5BCAD085-E8A6-8845-BD4E-CB4CCA059FC4}" type="datetimeFigureOut">
               <a:rPr lang="en-US" smtClean="0"/>
-              <a:t>9/17/2026</a:t>
+              <a:t>9/18/2026</a:t>
             </a:fld>
             <a:endParaRPr lang="en-US"/>
           </a:p>
@@ -4743,7 +4745,7 @@
           <a:p>
             <a:fld id="{5BCAD085-E8A6-8845-BD4E-CB4CCA059FC4}" type="datetimeFigureOut">
               <a:rPr lang="en-US" smtClean="0"/>
-              <a:t>9/17/2026</a:t>
+              <a:t>9/18/2026</a:t>
             </a:fld>
             <a:endParaRPr lang="en-US"/>
           </a:p>
@@ -5173,7 +5175,7 @@
             <p:ph sz="quarter" idx="10"/>
             <p:extLst>
               <p:ext uri="{D42A27DB-BD31-4B8C-83A1-F6EECF244321}">
-                <p14:modId xmlns:p14="http://schemas.microsoft.com/office/powerpoint/2010/main" val="273405146"/>
+                <p14:modId xmlns:p14="http://schemas.microsoft.com/office/powerpoint/2010/main" val="3025807901"/>
               </p:ext>
             </p:extLst>
           </p:nvPr>
@@ -5431,7 +5433,7 @@
                           <a:effectLst/>
                           <a:latin typeface="Inter"/>
                         </a:rPr>
-                        <a:t>10:30 – 10:45 –  Paus</a:t>
+                        <a:t>10:30 – 10:45 – Paus</a:t>
                       </a:r>
                     </a:p>
                   </a:txBody>
@@ -12514,6 +12516,1045 @@
 </p:sld>
 </file>
 
+<file path=ppt/slides/slide15.xml><?xml version="1.0" encoding="utf-8"?>
+<p:sld xmlns:a="http://schemas.openxmlformats.org/drawingml/2006/main" xmlns:r="http://schemas.openxmlformats.org/officeDocument/2006/relationships" xmlns:p="http://schemas.openxmlformats.org/presentationml/2006/main">
+  <p:cSld>
+    <p:spTree>
+      <p:nvGrpSpPr>
+        <p:cNvPr id="1" name=""/>
+        <p:cNvGrpSpPr/>
+        <p:nvPr/>
+      </p:nvGrpSpPr>
+      <p:grpSpPr>
+        <a:xfrm>
+          <a:off x="0" y="0"/>
+          <a:ext cx="0" cy="0"/>
+          <a:chOff x="0" y="0"/>
+          <a:chExt cx="0" cy="0"/>
+        </a:xfrm>
+      </p:grpSpPr>
+      <p:sp>
+        <p:nvSpPr>
+          <p:cNvPr id="3" name="TextBox 2">
+            <a:extLst>
+              <a:ext uri="{FF2B5EF4-FFF2-40B4-BE49-F238E27FC236}">
+                <a16:creationId xmlns:a16="http://schemas.microsoft.com/office/drawing/2014/main" id="{D27B1893-76FD-B04C-852B-56C97E10D4BB}"/>
+              </a:ext>
+            </a:extLst>
+          </p:cNvPr>
+          <p:cNvSpPr txBox="1"/>
+          <p:nvPr/>
+        </p:nvSpPr>
+        <p:spPr>
+          <a:xfrm>
+            <a:off x="1170432" y="1143000"/>
+            <a:ext cx="7980426" cy="2554545"/>
+          </a:xfrm>
+          <a:prstGeom prst="rect">
+            <a:avLst/>
+          </a:prstGeom>
+          <a:noFill/>
+        </p:spPr>
+        <p:txBody>
+          <a:bodyPr wrap="square">
+            <a:spAutoFit/>
+          </a:bodyPr>
+          <a:lstStyle/>
+          <a:p>
+            <a:pPr marL="342900" indent="-342900">
+              <a:buFont typeface="Arial" panose="020B0604020202020204" pitchFamily="34" charset="0"/>
+              <a:buChar char="•"/>
+            </a:pPr>
+            <a:r>
+              <a:rPr lang="en-GB" sz="3200" b="0" i="0" noProof="0" dirty="0" err="1">
+                <a:solidFill>
+                  <a:srgbClr val="121212"/>
+                </a:solidFill>
+                <a:effectLst/>
+                <a:latin typeface="Inter"/>
+              </a:rPr>
+              <a:t>Tagasiside</a:t>
+            </a:r>
+            <a:endParaRPr lang="en-GB" sz="3200" dirty="0">
+              <a:solidFill>
+                <a:srgbClr val="121212"/>
+              </a:solidFill>
+              <a:latin typeface="Inter"/>
+            </a:endParaRPr>
+          </a:p>
+          <a:p>
+            <a:pPr marL="342900" indent="-342900">
+              <a:buFont typeface="Arial" panose="020B0604020202020204" pitchFamily="34" charset="0"/>
+              <a:buChar char="•"/>
+            </a:pPr>
+            <a:r>
+              <a:rPr lang="en-GB" sz="3200" b="0" i="0" noProof="0" dirty="0" err="1">
+                <a:solidFill>
+                  <a:srgbClr val="121212"/>
+                </a:solidFill>
+                <a:effectLst/>
+                <a:latin typeface="Inter"/>
+              </a:rPr>
+              <a:t>Lõputööde</a:t>
+            </a:r>
+            <a:r>
+              <a:rPr lang="en-GB" sz="3200" b="0" i="0" noProof="0" dirty="0">
+                <a:solidFill>
+                  <a:srgbClr val="121212"/>
+                </a:solidFill>
+                <a:effectLst/>
+                <a:latin typeface="Inter"/>
+              </a:rPr>
+              <a:t> </a:t>
+            </a:r>
+            <a:r>
+              <a:rPr lang="en-GB" sz="3200" b="0" i="0" noProof="0" dirty="0" err="1">
+                <a:solidFill>
+                  <a:srgbClr val="121212"/>
+                </a:solidFill>
+                <a:effectLst/>
+                <a:latin typeface="Inter"/>
+              </a:rPr>
+              <a:t>arutelu</a:t>
+            </a:r>
+            <a:endParaRPr lang="en-GB" sz="3200" dirty="0">
+              <a:solidFill>
+                <a:srgbClr val="121212"/>
+              </a:solidFill>
+              <a:latin typeface="Inter"/>
+            </a:endParaRPr>
+          </a:p>
+          <a:p>
+            <a:pPr marL="800100" lvl="1" indent="-342900">
+              <a:buFont typeface="Arial" panose="020B0604020202020204" pitchFamily="34" charset="0"/>
+              <a:buChar char="•"/>
+            </a:pPr>
+            <a:r>
+              <a:rPr lang="en-GB" sz="3200" b="0" i="0" noProof="0" dirty="0" err="1">
+                <a:solidFill>
+                  <a:srgbClr val="121212"/>
+                </a:solidFill>
+                <a:effectLst/>
+                <a:latin typeface="Inter"/>
+              </a:rPr>
+              <a:t>Lõputöö</a:t>
+            </a:r>
+            <a:r>
+              <a:rPr lang="en-GB" sz="3200" b="0" i="0" noProof="0" dirty="0">
+                <a:solidFill>
+                  <a:srgbClr val="121212"/>
+                </a:solidFill>
+                <a:effectLst/>
+                <a:latin typeface="Inter"/>
+              </a:rPr>
+              <a:t> </a:t>
+            </a:r>
+            <a:r>
+              <a:rPr lang="en-GB" sz="3200" b="0" i="0" noProof="0" dirty="0" err="1">
+                <a:solidFill>
+                  <a:srgbClr val="121212"/>
+                </a:solidFill>
+                <a:effectLst/>
+                <a:latin typeface="Inter"/>
+              </a:rPr>
+              <a:t>osad</a:t>
+            </a:r>
+            <a:r>
+              <a:rPr lang="en-GB" sz="3200" b="0" i="0" noProof="0" dirty="0">
+                <a:solidFill>
+                  <a:srgbClr val="121212"/>
+                </a:solidFill>
+                <a:effectLst/>
+                <a:latin typeface="Inter"/>
+              </a:rPr>
+              <a:t> </a:t>
+            </a:r>
+            <a:r>
+              <a:rPr lang="en-GB" sz="3200" b="0" i="0" noProof="0" dirty="0" err="1">
+                <a:solidFill>
+                  <a:srgbClr val="121212"/>
+                </a:solidFill>
+                <a:effectLst/>
+                <a:latin typeface="Inter"/>
+              </a:rPr>
+              <a:t>ja</a:t>
+            </a:r>
+            <a:r>
+              <a:rPr lang="en-GB" sz="3200" b="0" i="0" noProof="0" dirty="0">
+                <a:solidFill>
+                  <a:srgbClr val="121212"/>
+                </a:solidFill>
+                <a:effectLst/>
+                <a:latin typeface="Inter"/>
+              </a:rPr>
+              <a:t> </a:t>
+            </a:r>
+            <a:r>
+              <a:rPr lang="en-GB" sz="3200" b="0" i="0" noProof="0" dirty="0" err="1">
+                <a:solidFill>
+                  <a:srgbClr val="121212"/>
+                </a:solidFill>
+                <a:effectLst/>
+                <a:latin typeface="Inter"/>
+              </a:rPr>
+              <a:t>ajakava</a:t>
+            </a:r>
+            <a:endParaRPr lang="en-GB" sz="3200" b="0" i="0" noProof="0" dirty="0">
+              <a:solidFill>
+                <a:srgbClr val="121212"/>
+              </a:solidFill>
+              <a:effectLst/>
+              <a:latin typeface="Inter"/>
+            </a:endParaRPr>
+          </a:p>
+          <a:p>
+            <a:pPr marL="800100" lvl="1" indent="-342900">
+              <a:buFont typeface="Arial" panose="020B0604020202020204" pitchFamily="34" charset="0"/>
+              <a:buChar char="•"/>
+            </a:pPr>
+            <a:r>
+              <a:rPr lang="en-GB" sz="3200" b="0" i="0" noProof="0" dirty="0" err="1">
+                <a:solidFill>
+                  <a:srgbClr val="121212"/>
+                </a:solidFill>
+                <a:effectLst/>
+                <a:latin typeface="Inter"/>
+              </a:rPr>
+              <a:t>teemade</a:t>
+            </a:r>
+            <a:r>
+              <a:rPr lang="en-GB" sz="3200" b="0" i="0" noProof="0" dirty="0">
+                <a:solidFill>
+                  <a:srgbClr val="121212"/>
+                </a:solidFill>
+                <a:effectLst/>
+                <a:latin typeface="Inter"/>
+              </a:rPr>
+              <a:t> </a:t>
+            </a:r>
+            <a:r>
+              <a:rPr lang="en-GB" sz="3200" b="0" i="0" noProof="0" dirty="0" err="1">
+                <a:solidFill>
+                  <a:srgbClr val="121212"/>
+                </a:solidFill>
+                <a:effectLst/>
+                <a:latin typeface="Inter"/>
+              </a:rPr>
+              <a:t>valiku</a:t>
+            </a:r>
+            <a:r>
+              <a:rPr lang="en-GB" sz="3200" b="0" i="0" noProof="0" dirty="0">
+                <a:solidFill>
+                  <a:srgbClr val="121212"/>
+                </a:solidFill>
+                <a:effectLst/>
+                <a:latin typeface="Inter"/>
+              </a:rPr>
+              <a:t> </a:t>
+            </a:r>
+            <a:r>
+              <a:rPr lang="en-GB" sz="3200" b="0" i="0" noProof="0" dirty="0" err="1">
+                <a:solidFill>
+                  <a:srgbClr val="121212"/>
+                </a:solidFill>
+                <a:effectLst/>
+                <a:latin typeface="Inter"/>
+              </a:rPr>
+              <a:t>kinnitamine</a:t>
+            </a:r>
+            <a:endParaRPr lang="en-GB" sz="3200" dirty="0">
+              <a:solidFill>
+                <a:srgbClr val="121212"/>
+              </a:solidFill>
+              <a:latin typeface="Inter"/>
+            </a:endParaRPr>
+          </a:p>
+          <a:p>
+            <a:pPr marL="800100" lvl="1" indent="-342900">
+              <a:buFont typeface="Arial" panose="020B0604020202020204" pitchFamily="34" charset="0"/>
+              <a:buChar char="•"/>
+            </a:pPr>
+            <a:r>
+              <a:rPr lang="en-GB" sz="3200" b="0" i="0" noProof="0" dirty="0" err="1">
+                <a:solidFill>
+                  <a:srgbClr val="121212"/>
+                </a:solidFill>
+                <a:effectLst/>
+                <a:latin typeface="Inter"/>
+              </a:rPr>
+              <a:t>konsultatsiooni</a:t>
+            </a:r>
+            <a:r>
+              <a:rPr lang="en-GB" sz="3200" b="0" i="0" noProof="0" dirty="0">
+                <a:solidFill>
+                  <a:srgbClr val="121212"/>
+                </a:solidFill>
+                <a:effectLst/>
+                <a:latin typeface="Inter"/>
+              </a:rPr>
+              <a:t> </a:t>
+            </a:r>
+            <a:r>
+              <a:rPr lang="en-GB" sz="3200" b="0" i="0" noProof="0" dirty="0" err="1">
+                <a:solidFill>
+                  <a:srgbClr val="121212"/>
+                </a:solidFill>
+                <a:effectLst/>
+                <a:latin typeface="Inter"/>
+              </a:rPr>
+              <a:t>aegade</a:t>
+            </a:r>
+            <a:r>
+              <a:rPr lang="en-GB" sz="3200" b="0" i="0" noProof="0" dirty="0">
+                <a:solidFill>
+                  <a:srgbClr val="121212"/>
+                </a:solidFill>
+                <a:effectLst/>
+                <a:latin typeface="Inter"/>
+              </a:rPr>
+              <a:t> </a:t>
+            </a:r>
+            <a:r>
+              <a:rPr lang="en-GB" sz="3200" b="0" i="0" noProof="0" dirty="0" err="1">
+                <a:solidFill>
+                  <a:srgbClr val="121212"/>
+                </a:solidFill>
+                <a:effectLst/>
+                <a:latin typeface="Inter"/>
+              </a:rPr>
+              <a:t>broneerimine</a:t>
+            </a:r>
+            <a:endParaRPr lang="en-GB" sz="2400" dirty="0"/>
+          </a:p>
+        </p:txBody>
+      </p:sp>
+    </p:spTree>
+    <p:extLst>
+      <p:ext uri="{BB962C8B-B14F-4D97-AF65-F5344CB8AC3E}">
+        <p14:creationId xmlns:p14="http://schemas.microsoft.com/office/powerpoint/2010/main" val="3239725938"/>
+      </p:ext>
+    </p:extLst>
+  </p:cSld>
+  <p:clrMapOvr>
+    <a:masterClrMapping/>
+  </p:clrMapOvr>
+</p:sld>
+</file>
+
+<file path=ppt/slides/slide16.xml><?xml version="1.0" encoding="utf-8"?>
+<p:sld xmlns:a="http://schemas.openxmlformats.org/drawingml/2006/main" xmlns:r="http://schemas.openxmlformats.org/officeDocument/2006/relationships" xmlns:p="http://schemas.openxmlformats.org/presentationml/2006/main">
+  <p:cSld>
+    <p:spTree>
+      <p:nvGrpSpPr>
+        <p:cNvPr id="1" name="">
+          <a:extLst>
+            <a:ext uri="{FF2B5EF4-FFF2-40B4-BE49-F238E27FC236}">
+              <a16:creationId xmlns:a16="http://schemas.microsoft.com/office/drawing/2014/main" id="{5F01FB96-6788-A9A3-B854-28F76070C511}"/>
+            </a:ext>
+          </a:extLst>
+        </p:cNvPr>
+        <p:cNvGrpSpPr/>
+        <p:nvPr/>
+      </p:nvGrpSpPr>
+      <p:grpSpPr>
+        <a:xfrm>
+          <a:off x="0" y="0"/>
+          <a:ext cx="0" cy="0"/>
+          <a:chOff x="0" y="0"/>
+          <a:chExt cx="0" cy="0"/>
+        </a:xfrm>
+      </p:grpSpPr>
+      <p:sp>
+        <p:nvSpPr>
+          <p:cNvPr id="3" name="Rectangle 2">
+            <a:extLst>
+              <a:ext uri="{FF2B5EF4-FFF2-40B4-BE49-F238E27FC236}">
+                <a16:creationId xmlns:a16="http://schemas.microsoft.com/office/drawing/2014/main" id="{8B60F605-1219-35CA-A96B-4E9B10562F8E}"/>
+              </a:ext>
+            </a:extLst>
+          </p:cNvPr>
+          <p:cNvSpPr/>
+          <p:nvPr/>
+        </p:nvSpPr>
+        <p:spPr>
+          <a:xfrm>
+            <a:off x="0" y="0"/>
+            <a:ext cx="12191695" cy="841248"/>
+          </a:xfrm>
+          <a:prstGeom prst="rect">
+            <a:avLst/>
+          </a:prstGeom>
+          <a:solidFill>
+            <a:srgbClr val="0F203E"/>
+          </a:solidFill>
+          <a:ln>
+            <a:noFill/>
+          </a:ln>
+          <a:effectLst/>
+        </p:spPr>
+        <p:style>
+          <a:lnRef idx="1">
+            <a:schemeClr val="accent1"/>
+          </a:lnRef>
+          <a:fillRef idx="3">
+            <a:schemeClr val="accent1"/>
+          </a:fillRef>
+          <a:effectRef idx="2">
+            <a:schemeClr val="accent1"/>
+          </a:effectRef>
+          <a:fontRef idx="minor">
+            <a:schemeClr val="lt1"/>
+          </a:fontRef>
+        </p:style>
+        <p:txBody>
+          <a:bodyPr rtlCol="0" anchor="ctr"/>
+          <a:lstStyle/>
+          <a:p>
+            <a:pPr algn="ctr"/>
+            <a:endParaRPr/>
+          </a:p>
+        </p:txBody>
+      </p:sp>
+      <p:sp>
+        <p:nvSpPr>
+          <p:cNvPr id="4" name="Rectangle 3">
+            <a:extLst>
+              <a:ext uri="{FF2B5EF4-FFF2-40B4-BE49-F238E27FC236}">
+                <a16:creationId xmlns:a16="http://schemas.microsoft.com/office/drawing/2014/main" id="{9282F188-8A54-2021-0CFE-A91E26A4D624}"/>
+              </a:ext>
+            </a:extLst>
+          </p:cNvPr>
+          <p:cNvSpPr/>
+          <p:nvPr/>
+        </p:nvSpPr>
+        <p:spPr>
+          <a:xfrm>
+            <a:off x="0" y="841248"/>
+            <a:ext cx="12191695" cy="73152"/>
+          </a:xfrm>
+          <a:prstGeom prst="rect">
+            <a:avLst/>
+          </a:prstGeom>
+          <a:solidFill>
+            <a:srgbClr val="007073"/>
+          </a:solidFill>
+          <a:ln>
+            <a:noFill/>
+          </a:ln>
+          <a:effectLst/>
+        </p:spPr>
+        <p:style>
+          <a:lnRef idx="1">
+            <a:schemeClr val="accent1"/>
+          </a:lnRef>
+          <a:fillRef idx="3">
+            <a:schemeClr val="accent1"/>
+          </a:fillRef>
+          <a:effectRef idx="2">
+            <a:schemeClr val="accent1"/>
+          </a:effectRef>
+          <a:fontRef idx="minor">
+            <a:schemeClr val="lt1"/>
+          </a:fontRef>
+        </p:style>
+        <p:txBody>
+          <a:bodyPr rtlCol="0" anchor="ctr"/>
+          <a:lstStyle/>
+          <a:p>
+            <a:pPr algn="ctr"/>
+            <a:endParaRPr/>
+          </a:p>
+        </p:txBody>
+      </p:sp>
+      <p:sp>
+        <p:nvSpPr>
+          <p:cNvPr id="6" name="Rectangle 5">
+            <a:extLst>
+              <a:ext uri="{FF2B5EF4-FFF2-40B4-BE49-F238E27FC236}">
+                <a16:creationId xmlns:a16="http://schemas.microsoft.com/office/drawing/2014/main" id="{26DC305A-9872-B221-2034-B0914D5F40C6}"/>
+              </a:ext>
+            </a:extLst>
+          </p:cNvPr>
+          <p:cNvSpPr/>
+          <p:nvPr/>
+        </p:nvSpPr>
+        <p:spPr>
+          <a:xfrm>
+            <a:off x="0" y="6601968"/>
+            <a:ext cx="12191695" cy="256032"/>
+          </a:xfrm>
+          <a:prstGeom prst="rect">
+            <a:avLst/>
+          </a:prstGeom>
+          <a:solidFill>
+            <a:srgbClr val="0F203E"/>
+          </a:solidFill>
+          <a:ln>
+            <a:noFill/>
+          </a:ln>
+          <a:effectLst/>
+        </p:spPr>
+        <p:style>
+          <a:lnRef idx="1">
+            <a:schemeClr val="accent1"/>
+          </a:lnRef>
+          <a:fillRef idx="3">
+            <a:schemeClr val="accent1"/>
+          </a:fillRef>
+          <a:effectRef idx="2">
+            <a:schemeClr val="accent1"/>
+          </a:effectRef>
+          <a:fontRef idx="minor">
+            <a:schemeClr val="lt1"/>
+          </a:fontRef>
+        </p:style>
+        <p:txBody>
+          <a:bodyPr rtlCol="0" anchor="ctr"/>
+          <a:lstStyle/>
+          <a:p>
+            <a:pPr algn="ctr"/>
+            <a:endParaRPr/>
+          </a:p>
+        </p:txBody>
+      </p:sp>
+      <p:sp>
+        <p:nvSpPr>
+          <p:cNvPr id="7" name="TextBox 6">
+            <a:extLst>
+              <a:ext uri="{FF2B5EF4-FFF2-40B4-BE49-F238E27FC236}">
+                <a16:creationId xmlns:a16="http://schemas.microsoft.com/office/drawing/2014/main" id="{1993CDDA-77C7-0175-6F25-A2E0F7E87AED}"/>
+              </a:ext>
+            </a:extLst>
+          </p:cNvPr>
+          <p:cNvSpPr txBox="1"/>
+          <p:nvPr/>
+        </p:nvSpPr>
+        <p:spPr>
+          <a:xfrm>
+            <a:off x="365760" y="6601968"/>
+            <a:ext cx="8229600" cy="256032"/>
+          </a:xfrm>
+          <a:prstGeom prst="rect">
+            <a:avLst/>
+          </a:prstGeom>
+          <a:noFill/>
+        </p:spPr>
+        <p:txBody>
+          <a:bodyPr wrap="square" anchor="ctr">
+            <a:spAutoFit/>
+          </a:bodyPr>
+          <a:lstStyle/>
+          <a:p>
+            <a:pPr algn="l"/>
+            <a:r>
+              <a:rPr sz="1100" b="0">
+                <a:solidFill>
+                  <a:srgbClr val="94A3B8"/>
+                </a:solidFill>
+                <a:latin typeface="Calibri"/>
+              </a:rPr>
+              <a:t>Andmetarkus  ·  GitHub · GitHub Desktop</a:t>
+            </a:r>
+          </a:p>
+        </p:txBody>
+      </p:sp>
+      <p:sp>
+        <p:nvSpPr>
+          <p:cNvPr id="8" name="TextBox 7">
+            <a:extLst>
+              <a:ext uri="{FF2B5EF4-FFF2-40B4-BE49-F238E27FC236}">
+                <a16:creationId xmlns:a16="http://schemas.microsoft.com/office/drawing/2014/main" id="{E84A4B38-4493-568C-CD16-12283E8A35C4}"/>
+              </a:ext>
+            </a:extLst>
+          </p:cNvPr>
+          <p:cNvSpPr txBox="1"/>
+          <p:nvPr/>
+        </p:nvSpPr>
+        <p:spPr>
+          <a:xfrm>
+            <a:off x="9601200" y="6601968"/>
+            <a:ext cx="2194560" cy="256032"/>
+          </a:xfrm>
+          <a:prstGeom prst="rect">
+            <a:avLst/>
+          </a:prstGeom>
+          <a:noFill/>
+        </p:spPr>
+        <p:txBody>
+          <a:bodyPr wrap="square" anchor="ctr">
+            <a:spAutoFit/>
+          </a:bodyPr>
+          <a:lstStyle/>
+          <a:p>
+            <a:pPr algn="r"/>
+            <a:r>
+              <a:rPr sz="1100" b="0">
+                <a:solidFill>
+                  <a:srgbClr val="94A3B8"/>
+                </a:solidFill>
+                <a:latin typeface="Calibri"/>
+              </a:rPr>
+              <a:t>8</a:t>
+            </a:r>
+          </a:p>
+        </p:txBody>
+      </p:sp>
+      <p:sp>
+        <p:nvSpPr>
+          <p:cNvPr id="15" name="Rounded Rectangle 14">
+            <a:extLst>
+              <a:ext uri="{FF2B5EF4-FFF2-40B4-BE49-F238E27FC236}">
+                <a16:creationId xmlns:a16="http://schemas.microsoft.com/office/drawing/2014/main" id="{D1FB1289-19FE-39B9-E731-16FFD6F8CD1F}"/>
+              </a:ext>
+            </a:extLst>
+          </p:cNvPr>
+          <p:cNvSpPr/>
+          <p:nvPr/>
+        </p:nvSpPr>
+        <p:spPr>
+          <a:xfrm>
+            <a:off x="365760" y="1554480"/>
+            <a:ext cx="11318240" cy="4709160"/>
+          </a:xfrm>
+          <a:prstGeom prst="roundRect">
+            <a:avLst>
+              <a:gd name="adj" fmla="val 8000"/>
+            </a:avLst>
+          </a:prstGeom>
+          <a:solidFill>
+            <a:srgbClr val="FFFFFF"/>
+          </a:solidFill>
+          <a:ln>
+            <a:noFill/>
+          </a:ln>
+          <a:effectLst/>
+        </p:spPr>
+        <p:style>
+          <a:lnRef idx="1">
+            <a:schemeClr val="accent1"/>
+          </a:lnRef>
+          <a:fillRef idx="3">
+            <a:schemeClr val="accent1"/>
+          </a:fillRef>
+          <a:effectRef idx="2">
+            <a:schemeClr val="accent1"/>
+          </a:effectRef>
+          <a:fontRef idx="minor">
+            <a:schemeClr val="lt1"/>
+          </a:fontRef>
+        </p:style>
+        <p:txBody>
+          <a:bodyPr rtlCol="0" anchor="ctr"/>
+          <a:lstStyle/>
+          <a:p>
+            <a:pPr algn="ctr"/>
+            <a:endParaRPr sz="2800"/>
+          </a:p>
+        </p:txBody>
+      </p:sp>
+      <p:sp>
+        <p:nvSpPr>
+          <p:cNvPr id="16" name="TextBox 15">
+            <a:extLst>
+              <a:ext uri="{FF2B5EF4-FFF2-40B4-BE49-F238E27FC236}">
+                <a16:creationId xmlns:a16="http://schemas.microsoft.com/office/drawing/2014/main" id="{86078A80-77EF-2B1F-3512-C8F9F8CB10BD}"/>
+              </a:ext>
+            </a:extLst>
+          </p:cNvPr>
+          <p:cNvSpPr txBox="1"/>
+          <p:nvPr/>
+        </p:nvSpPr>
+        <p:spPr>
+          <a:xfrm>
+            <a:off x="292608" y="263492"/>
+            <a:ext cx="5120640" cy="365760"/>
+          </a:xfrm>
+          <a:prstGeom prst="rect">
+            <a:avLst/>
+          </a:prstGeom>
+          <a:noFill/>
+        </p:spPr>
+        <p:txBody>
+          <a:bodyPr wrap="square" anchor="t">
+            <a:spAutoFit/>
+          </a:bodyPr>
+          <a:lstStyle/>
+          <a:p>
+            <a:pPr algn="l"/>
+            <a:r>
+              <a:rPr lang="en-GB" sz="1800" b="1" dirty="0">
+                <a:solidFill>
+                  <a:srgbClr val="92D050"/>
+                </a:solidFill>
+                <a:latin typeface="Calibri"/>
+              </a:rPr>
+              <a:t>LISAHARJUTUS – python + </a:t>
+            </a:r>
+            <a:r>
+              <a:rPr lang="en-GB" sz="1800" b="1" dirty="0" err="1">
+                <a:solidFill>
+                  <a:srgbClr val="92D050"/>
+                </a:solidFill>
+                <a:latin typeface="Calibri"/>
+              </a:rPr>
+              <a:t>sql</a:t>
+            </a:r>
+            <a:r>
+              <a:rPr lang="en-GB" sz="1800" b="1" dirty="0">
+                <a:solidFill>
+                  <a:srgbClr val="92D050"/>
+                </a:solidFill>
+                <a:latin typeface="Calibri"/>
+              </a:rPr>
+              <a:t> + power bi</a:t>
+            </a:r>
+          </a:p>
+        </p:txBody>
+      </p:sp>
+      <p:sp>
+        <p:nvSpPr>
+          <p:cNvPr id="18" name="TextBox 17">
+            <a:extLst>
+              <a:ext uri="{FF2B5EF4-FFF2-40B4-BE49-F238E27FC236}">
+                <a16:creationId xmlns:a16="http://schemas.microsoft.com/office/drawing/2014/main" id="{34C7A5A5-F7BE-892C-864B-96A9F91EC11F}"/>
+              </a:ext>
+            </a:extLst>
+          </p:cNvPr>
+          <p:cNvSpPr txBox="1"/>
+          <p:nvPr/>
+        </p:nvSpPr>
+        <p:spPr>
+          <a:xfrm>
+            <a:off x="292608" y="1130487"/>
+            <a:ext cx="9650307" cy="1631216"/>
+          </a:xfrm>
+          <a:prstGeom prst="rect">
+            <a:avLst/>
+          </a:prstGeom>
+          <a:noFill/>
+        </p:spPr>
+        <p:txBody>
+          <a:bodyPr wrap="square">
+            <a:spAutoFit/>
+          </a:bodyPr>
+          <a:lstStyle/>
+          <a:p>
+            <a:pPr>
+              <a:spcAft>
+                <a:spcPts val="800"/>
+              </a:spcAft>
+            </a:pPr>
+            <a:r>
+              <a:rPr lang="en-GB" sz="2000" b="0" dirty="0" err="1">
+                <a:solidFill>
+                  <a:srgbClr val="334155"/>
+                </a:solidFill>
+                <a:latin typeface="Calibri"/>
+              </a:rPr>
+              <a:t>Githubis</a:t>
+            </a:r>
+            <a:r>
+              <a:rPr lang="en-GB" sz="2000" b="0" dirty="0">
+                <a:solidFill>
+                  <a:srgbClr val="334155"/>
+                </a:solidFill>
+                <a:latin typeface="Calibri"/>
+              </a:rPr>
+              <a:t> </a:t>
+            </a:r>
+            <a:r>
+              <a:rPr lang="en-GB" sz="2000" b="0" dirty="0" err="1">
+                <a:solidFill>
+                  <a:srgbClr val="334155"/>
+                </a:solidFill>
+                <a:latin typeface="Calibri"/>
+              </a:rPr>
+              <a:t>kaust</a:t>
+            </a:r>
+            <a:r>
+              <a:rPr lang="en-GB" sz="2000" dirty="0">
+                <a:solidFill>
+                  <a:srgbClr val="334155"/>
+                </a:solidFill>
+              </a:rPr>
+              <a:t> ‘</a:t>
+            </a:r>
+            <a:r>
+              <a:rPr lang="en-GB" sz="2000" dirty="0" err="1">
+                <a:solidFill>
+                  <a:srgbClr val="334155"/>
+                </a:solidFill>
+              </a:rPr>
+              <a:t>python_sql_pbi</a:t>
+            </a:r>
+            <a:r>
+              <a:rPr lang="en-GB" sz="2000" dirty="0">
+                <a:solidFill>
+                  <a:srgbClr val="334155"/>
+                </a:solidFill>
+              </a:rPr>
+              <a:t> </a:t>
+            </a:r>
+            <a:r>
+              <a:rPr lang="en-GB" sz="2000" dirty="0" err="1">
+                <a:solidFill>
+                  <a:srgbClr val="334155"/>
+                </a:solidFill>
+              </a:rPr>
+              <a:t>harjutus</a:t>
+            </a:r>
+            <a:r>
+              <a:rPr lang="en-GB" sz="2000" dirty="0">
+                <a:solidFill>
+                  <a:srgbClr val="334155"/>
+                </a:solidFill>
+              </a:rPr>
+              <a:t>’</a:t>
+            </a:r>
+          </a:p>
+          <a:p>
+            <a:pPr marL="285750" indent="-285750">
+              <a:spcAft>
+                <a:spcPts val="800"/>
+              </a:spcAft>
+              <a:buFontTx/>
+              <a:buChar char="-"/>
+            </a:pPr>
+            <a:r>
+              <a:rPr lang="en-GB" sz="2000" b="0" dirty="0" err="1">
+                <a:solidFill>
+                  <a:srgbClr val="334155"/>
+                </a:solidFill>
+                <a:latin typeface="Calibri"/>
+              </a:rPr>
+              <a:t>Pythoniga</a:t>
+            </a:r>
+            <a:r>
+              <a:rPr lang="en-GB" sz="2000" b="0" dirty="0">
+                <a:solidFill>
+                  <a:srgbClr val="334155"/>
+                </a:solidFill>
+                <a:latin typeface="Calibri"/>
+              </a:rPr>
+              <a:t> </a:t>
+            </a:r>
+            <a:r>
+              <a:rPr lang="en-GB" sz="2000" b="0" dirty="0" err="1">
+                <a:solidFill>
+                  <a:srgbClr val="334155"/>
+                </a:solidFill>
+                <a:latin typeface="Calibri"/>
+              </a:rPr>
+              <a:t>liikumisaktiivsuse</a:t>
+            </a:r>
+            <a:r>
+              <a:rPr lang="en-GB" sz="2000" b="0" dirty="0">
+                <a:solidFill>
+                  <a:srgbClr val="334155"/>
+                </a:solidFill>
+                <a:latin typeface="Calibri"/>
+              </a:rPr>
+              <a:t> org + </a:t>
+            </a:r>
+            <a:r>
+              <a:rPr lang="en-GB" sz="2000" b="0" dirty="0" err="1">
+                <a:solidFill>
+                  <a:srgbClr val="334155"/>
+                </a:solidFill>
+                <a:latin typeface="Calibri"/>
+              </a:rPr>
+              <a:t>tegevused</a:t>
+            </a:r>
+            <a:endParaRPr lang="en-GB" sz="2000" b="0" dirty="0">
+              <a:solidFill>
+                <a:srgbClr val="334155"/>
+              </a:solidFill>
+              <a:latin typeface="Calibri"/>
+            </a:endParaRPr>
+          </a:p>
+          <a:p>
+            <a:pPr marL="285750" indent="-285750">
+              <a:spcAft>
+                <a:spcPts val="800"/>
+              </a:spcAft>
+              <a:buFontTx/>
+              <a:buChar char="-"/>
+            </a:pPr>
+            <a:r>
+              <a:rPr lang="en-GB" sz="2000" dirty="0" err="1">
+                <a:solidFill>
+                  <a:srgbClr val="334155"/>
+                </a:solidFill>
+                <a:latin typeface="Calibri"/>
+              </a:rPr>
+              <a:t>Sql</a:t>
+            </a:r>
+            <a:r>
+              <a:rPr lang="en-GB" sz="2000" dirty="0">
+                <a:solidFill>
+                  <a:srgbClr val="334155"/>
+                </a:solidFill>
+                <a:latin typeface="Calibri"/>
+              </a:rPr>
+              <a:t> dim </a:t>
+            </a:r>
+            <a:r>
+              <a:rPr lang="en-GB" sz="2000" dirty="0" err="1">
+                <a:solidFill>
+                  <a:srgbClr val="334155"/>
+                </a:solidFill>
+                <a:latin typeface="Calibri"/>
+              </a:rPr>
+              <a:t>ja</a:t>
+            </a:r>
+            <a:r>
+              <a:rPr lang="en-GB" sz="2000" dirty="0">
+                <a:solidFill>
+                  <a:srgbClr val="334155"/>
+                </a:solidFill>
+                <a:latin typeface="Calibri"/>
+              </a:rPr>
+              <a:t> </a:t>
+            </a:r>
+            <a:r>
+              <a:rPr lang="en-GB" sz="2000" dirty="0" err="1">
+                <a:solidFill>
+                  <a:srgbClr val="334155"/>
+                </a:solidFill>
+                <a:latin typeface="Calibri"/>
+              </a:rPr>
+              <a:t>fakt</a:t>
+            </a:r>
+            <a:r>
+              <a:rPr lang="en-GB" sz="2000" dirty="0">
+                <a:solidFill>
+                  <a:srgbClr val="334155"/>
+                </a:solidFill>
+                <a:latin typeface="Calibri"/>
+              </a:rPr>
+              <a:t> </a:t>
+            </a:r>
+            <a:r>
+              <a:rPr lang="en-GB" sz="2000" dirty="0" err="1">
+                <a:solidFill>
+                  <a:srgbClr val="334155"/>
+                </a:solidFill>
+                <a:latin typeface="Calibri"/>
+              </a:rPr>
+              <a:t>loomiseks</a:t>
+            </a:r>
+            <a:r>
+              <a:rPr lang="en-GB" sz="2000" dirty="0">
+                <a:solidFill>
+                  <a:srgbClr val="334155"/>
+                </a:solidFill>
+                <a:latin typeface="Calibri"/>
+              </a:rPr>
+              <a:t> (</a:t>
+            </a:r>
+            <a:r>
+              <a:rPr lang="en-GB" sz="2000" dirty="0" err="1">
+                <a:solidFill>
+                  <a:srgbClr val="334155"/>
+                </a:solidFill>
+                <a:latin typeface="Calibri"/>
+              </a:rPr>
+              <a:t>protseduur</a:t>
+            </a:r>
+            <a:r>
+              <a:rPr lang="en-GB" sz="2000" dirty="0">
+                <a:solidFill>
+                  <a:srgbClr val="334155"/>
+                </a:solidFill>
+                <a:latin typeface="Calibri"/>
+              </a:rPr>
+              <a:t>)</a:t>
+            </a:r>
+          </a:p>
+          <a:p>
+            <a:pPr marL="285750" indent="-285750">
+              <a:spcAft>
+                <a:spcPts val="800"/>
+              </a:spcAft>
+              <a:buFontTx/>
+              <a:buChar char="-"/>
+            </a:pPr>
+            <a:r>
+              <a:rPr lang="en-GB" sz="2000" b="0" dirty="0">
+                <a:solidFill>
+                  <a:srgbClr val="334155"/>
+                </a:solidFill>
+                <a:latin typeface="Calibri"/>
+              </a:rPr>
+              <a:t>Power bi </a:t>
+            </a:r>
+            <a:r>
+              <a:rPr lang="en-GB" sz="2000" b="0" dirty="0" err="1">
+                <a:solidFill>
+                  <a:srgbClr val="334155"/>
+                </a:solidFill>
+                <a:latin typeface="Calibri"/>
+              </a:rPr>
+              <a:t>raport</a:t>
+            </a:r>
+            <a:r>
+              <a:rPr lang="en-GB" sz="2000" b="0" dirty="0">
+                <a:solidFill>
+                  <a:srgbClr val="334155"/>
+                </a:solidFill>
+                <a:latin typeface="Calibri"/>
+              </a:rPr>
+              <a:t> </a:t>
+            </a:r>
+            <a:r>
+              <a:rPr lang="en-GB" sz="2000" b="0" dirty="0" err="1">
+                <a:solidFill>
+                  <a:srgbClr val="334155"/>
+                </a:solidFill>
+                <a:latin typeface="Calibri"/>
+              </a:rPr>
+              <a:t>postgre</a:t>
+            </a:r>
+            <a:r>
+              <a:rPr lang="en-GB" sz="2000" b="0" dirty="0">
+                <a:solidFill>
+                  <a:srgbClr val="334155"/>
+                </a:solidFill>
+                <a:latin typeface="Calibri"/>
+              </a:rPr>
+              <a:t> </a:t>
+            </a:r>
+            <a:r>
+              <a:rPr lang="en-GB" sz="2000" b="0" dirty="0" err="1">
+                <a:solidFill>
+                  <a:srgbClr val="334155"/>
+                </a:solidFill>
+                <a:latin typeface="Calibri"/>
+              </a:rPr>
+              <a:t>pealt</a:t>
+            </a:r>
+            <a:endParaRPr lang="en-GB" sz="2000" b="0" dirty="0">
+              <a:solidFill>
+                <a:srgbClr val="334155"/>
+              </a:solidFill>
+              <a:latin typeface="Calibri"/>
+            </a:endParaRPr>
+          </a:p>
+        </p:txBody>
+      </p:sp>
+    </p:spTree>
+    <p:extLst>
+      <p:ext uri="{BB962C8B-B14F-4D97-AF65-F5344CB8AC3E}">
+        <p14:creationId xmlns:p14="http://schemas.microsoft.com/office/powerpoint/2010/main" val="114881656"/>
+      </p:ext>
+    </p:extLst>
+  </p:cSld>
+  <p:clrMapOvr>
+    <a:masterClrMapping/>
+  </p:clrMapOvr>
+</p:sld>
+</file>
+
 <file path=ppt/slides/slide2.xml><?xml version="1.0" encoding="utf-8"?>
 <p:sld xmlns:a="http://schemas.openxmlformats.org/drawingml/2006/main" xmlns:r="http://schemas.openxmlformats.org/officeDocument/2006/relationships" xmlns:p="http://schemas.openxmlformats.org/presentationml/2006/main">
   <p:cSld>
@@ -14882,7 +15923,7 @@
         </p:blipFill>
         <p:spPr>
           <a:xfrm>
-            <a:off x="136925" y="683918"/>
+            <a:off x="136925" y="940693"/>
             <a:ext cx="4844519" cy="5634981"/>
           </a:xfrm>
           <a:prstGeom prst="rect">
@@ -15079,7 +16120,7 @@
         </p:nvSpPr>
         <p:spPr>
           <a:xfrm>
-            <a:off x="5240864" y="3957956"/>
+            <a:off x="5511797" y="3501408"/>
             <a:ext cx="6703907" cy="646331"/>
           </a:xfrm>
           <a:prstGeom prst="rect">
@@ -15094,8 +16135,12 @@
           <a:lstStyle/>
           <a:p>
             <a:r>
+              <a:rPr lang="en-GB" dirty="0"/>
+              <a:t>Branch </a:t>
+            </a:r>
+            <a:r>
               <a:rPr lang="en-GB" dirty="0" err="1"/>
-              <a:t>Lihtsalt</a:t>
+              <a:t>ehk</a:t>
             </a:r>
             <a:r>
               <a:rPr lang="en-GB" dirty="0"/>
@@ -15103,21 +16148,13 @@
             </a:r>
             <a:r>
               <a:rPr lang="en-GB" dirty="0" err="1"/>
-              <a:t>öeldes</a:t>
+              <a:t>haru</a:t>
             </a:r>
             <a:r>
               <a:rPr lang="en-GB" dirty="0"/>
               <a:t> on </a:t>
             </a:r>
             <a:r>
-              <a:rPr lang="en-GB" dirty="0" err="1"/>
-              <a:t>haru</a:t>
-            </a:r>
-            <a:r>
-              <a:rPr lang="en-GB" dirty="0"/>
-              <a:t> </a:t>
-            </a:r>
-            <a:r>
               <a:rPr lang="en-GB" b="1" dirty="0" err="1"/>
               <a:t>projekti</a:t>
             </a:r>
@@ -15228,6 +16265,178 @@
             <a:r>
               <a:rPr lang="en-GB" dirty="0" err="1"/>
               <a:t>mõjutamata</a:t>
+            </a:r>
+            <a:r>
+              <a:rPr lang="en-GB" dirty="0"/>
+              <a:t>.</a:t>
+            </a:r>
+          </a:p>
+        </p:txBody>
+      </p:sp>
+      <p:sp>
+        <p:nvSpPr>
+          <p:cNvPr id="9" name="TextBox 8">
+            <a:extLst>
+              <a:ext uri="{FF2B5EF4-FFF2-40B4-BE49-F238E27FC236}">
+                <a16:creationId xmlns:a16="http://schemas.microsoft.com/office/drawing/2014/main" id="{F140ABA0-7309-01A6-2A02-483208A92EC6}"/>
+              </a:ext>
+            </a:extLst>
+          </p:cNvPr>
+          <p:cNvSpPr txBox="1"/>
+          <p:nvPr/>
+        </p:nvSpPr>
+        <p:spPr>
+          <a:xfrm>
+            <a:off x="5511797" y="4669870"/>
+            <a:ext cx="2377440" cy="400110"/>
+          </a:xfrm>
+          <a:prstGeom prst="rect">
+            <a:avLst/>
+          </a:prstGeom>
+          <a:noFill/>
+        </p:spPr>
+        <p:txBody>
+          <a:bodyPr wrap="square" anchor="ctr">
+            <a:spAutoFit/>
+          </a:bodyPr>
+          <a:lstStyle/>
+          <a:p>
+            <a:r>
+              <a:rPr lang="en-GB" sz="2000" b="1" dirty="0" err="1"/>
+              <a:t>Töö</a:t>
+            </a:r>
+            <a:r>
+              <a:rPr lang="en-GB" sz="2000" b="1" dirty="0"/>
+              <a:t> </a:t>
+            </a:r>
+            <a:r>
+              <a:rPr lang="en-GB" sz="2000" b="1" dirty="0" err="1"/>
+              <a:t>ilma</a:t>
+            </a:r>
+            <a:r>
+              <a:rPr lang="en-GB" sz="2000" b="1" dirty="0"/>
+              <a:t> </a:t>
+            </a:r>
+            <a:r>
+              <a:rPr lang="en-GB" sz="2000" b="1" dirty="0" err="1"/>
+              <a:t>branchita</a:t>
+            </a:r>
+            <a:endParaRPr sz="2000" b="1" dirty="0">
+              <a:solidFill>
+                <a:srgbClr val="0F203E"/>
+              </a:solidFill>
+              <a:latin typeface="Calibri"/>
+            </a:endParaRPr>
+          </a:p>
+        </p:txBody>
+      </p:sp>
+      <p:sp>
+        <p:nvSpPr>
+          <p:cNvPr id="11" name="TextBox 10">
+            <a:extLst>
+              <a:ext uri="{FF2B5EF4-FFF2-40B4-BE49-F238E27FC236}">
+                <a16:creationId xmlns:a16="http://schemas.microsoft.com/office/drawing/2014/main" id="{F4B56C39-30BB-4BE6-8262-DD51E73AFFE5}"/>
+              </a:ext>
+            </a:extLst>
+          </p:cNvPr>
+          <p:cNvSpPr txBox="1"/>
+          <p:nvPr/>
+        </p:nvSpPr>
+        <p:spPr>
+          <a:xfrm>
+            <a:off x="5511797" y="5069979"/>
+            <a:ext cx="6703907" cy="646331"/>
+          </a:xfrm>
+          <a:prstGeom prst="rect">
+            <a:avLst/>
+          </a:prstGeom>
+          <a:noFill/>
+        </p:spPr>
+        <p:txBody>
+          <a:bodyPr wrap="square" anchor="ctr">
+            <a:spAutoFit/>
+          </a:bodyPr>
+          <a:lstStyle/>
+          <a:p>
+            <a:r>
+              <a:rPr lang="en-GB" dirty="0"/>
+              <a:t>On </a:t>
+            </a:r>
+            <a:r>
+              <a:rPr lang="en-GB" dirty="0" err="1"/>
+              <a:t>võimaliktöötada</a:t>
+            </a:r>
+            <a:r>
+              <a:rPr lang="en-GB" dirty="0"/>
+              <a:t> ka </a:t>
+            </a:r>
+            <a:r>
+              <a:rPr lang="en-GB" dirty="0" err="1"/>
+              <a:t>ainult</a:t>
+            </a:r>
+            <a:r>
+              <a:rPr lang="en-GB" dirty="0"/>
+              <a:t> ‘main’ </a:t>
+            </a:r>
+            <a:r>
+              <a:rPr lang="en-GB" dirty="0" err="1"/>
+              <a:t>harus</a:t>
+            </a:r>
+            <a:r>
+              <a:rPr lang="en-GB" dirty="0"/>
+              <a:t>. </a:t>
+            </a:r>
+            <a:r>
+              <a:rPr lang="en-GB" dirty="0" err="1"/>
+              <a:t>Siis</a:t>
+            </a:r>
+            <a:r>
+              <a:rPr lang="en-GB" dirty="0"/>
+              <a:t> </a:t>
+            </a:r>
+            <a:r>
+              <a:rPr lang="en-GB" dirty="0" err="1"/>
+              <a:t>kasutajad</a:t>
+            </a:r>
+            <a:r>
+              <a:rPr lang="en-GB" dirty="0"/>
+              <a:t> </a:t>
+            </a:r>
+            <a:r>
+              <a:rPr lang="en-GB" dirty="0" err="1"/>
+              <a:t>salvestavad</a:t>
+            </a:r>
+            <a:r>
+              <a:rPr lang="en-GB" dirty="0"/>
+              <a:t> </a:t>
+            </a:r>
+            <a:r>
+              <a:rPr lang="en-GB" dirty="0" err="1"/>
+              <a:t>oma</a:t>
+            </a:r>
+            <a:r>
+              <a:rPr lang="en-GB" dirty="0"/>
+              <a:t> </a:t>
+            </a:r>
+            <a:r>
+              <a:rPr lang="en-GB" dirty="0" err="1"/>
+              <a:t>muudatused</a:t>
+            </a:r>
+            <a:r>
+              <a:rPr lang="en-GB" dirty="0"/>
+              <a:t> </a:t>
+            </a:r>
+            <a:r>
+              <a:rPr lang="en-GB" dirty="0" err="1"/>
+              <a:t>otse</a:t>
+            </a:r>
+            <a:r>
+              <a:rPr lang="en-GB" dirty="0"/>
+              <a:t> </a:t>
+            </a:r>
+            <a:r>
+              <a:rPr lang="en-GB" dirty="0" err="1"/>
+              <a:t>peaharusse</a:t>
             </a:r>
             <a:r>
               <a:rPr lang="en-GB" dirty="0"/>

--- a/Materjalid/Day15 Github/github-desktop-esitlus.pptx
+++ b/Materjalid/Day15 Github/github-desktop-esitlus.pptx
@@ -12547,8 +12547,8 @@
         </p:nvSpPr>
         <p:spPr>
           <a:xfrm>
-            <a:off x="1170432" y="1143000"/>
-            <a:ext cx="7980426" cy="2554545"/>
+            <a:off x="902208" y="612844"/>
+            <a:ext cx="10387584" cy="5632311"/>
           </a:xfrm>
           <a:prstGeom prst="rect">
             <a:avLst/>
@@ -12566,7 +12566,7 @@
               <a:buChar char="•"/>
             </a:pPr>
             <a:r>
-              <a:rPr lang="en-GB" sz="3200" b="0" i="0" noProof="0" dirty="0" err="1">
+              <a:rPr lang="en-GB" sz="2400" b="0" i="0" noProof="0" dirty="0" err="1">
                 <a:solidFill>
                   <a:srgbClr val="121212"/>
                 </a:solidFill>
@@ -12575,131 +12575,7 @@
               </a:rPr>
               <a:t>Tagasiside</a:t>
             </a:r>
-            <a:endParaRPr lang="en-GB" sz="3200" dirty="0">
-              <a:solidFill>
-                <a:srgbClr val="121212"/>
-              </a:solidFill>
-              <a:latin typeface="Inter"/>
-            </a:endParaRPr>
-          </a:p>
-          <a:p>
-            <a:pPr marL="342900" indent="-342900">
-              <a:buFont typeface="Arial" panose="020B0604020202020204" pitchFamily="34" charset="0"/>
-              <a:buChar char="•"/>
-            </a:pPr>
-            <a:r>
-              <a:rPr lang="en-GB" sz="3200" b="0" i="0" noProof="0" dirty="0" err="1">
-                <a:solidFill>
-                  <a:srgbClr val="121212"/>
-                </a:solidFill>
-                <a:effectLst/>
-                <a:latin typeface="Inter"/>
-              </a:rPr>
-              <a:t>Lõputööde</a:t>
-            </a:r>
-            <a:r>
-              <a:rPr lang="en-GB" sz="3200" b="0" i="0" noProof="0" dirty="0">
-                <a:solidFill>
-                  <a:srgbClr val="121212"/>
-                </a:solidFill>
-                <a:effectLst/>
-                <a:latin typeface="Inter"/>
-              </a:rPr>
-              <a:t> </a:t>
-            </a:r>
-            <a:r>
-              <a:rPr lang="en-GB" sz="3200" b="0" i="0" noProof="0" dirty="0" err="1">
-                <a:solidFill>
-                  <a:srgbClr val="121212"/>
-                </a:solidFill>
-                <a:effectLst/>
-                <a:latin typeface="Inter"/>
-              </a:rPr>
-              <a:t>arutelu</a:t>
-            </a:r>
-            <a:endParaRPr lang="en-GB" sz="3200" dirty="0">
-              <a:solidFill>
-                <a:srgbClr val="121212"/>
-              </a:solidFill>
-              <a:latin typeface="Inter"/>
-            </a:endParaRPr>
-          </a:p>
-          <a:p>
-            <a:pPr marL="800100" lvl="1" indent="-342900">
-              <a:buFont typeface="Arial" panose="020B0604020202020204" pitchFamily="34" charset="0"/>
-              <a:buChar char="•"/>
-            </a:pPr>
-            <a:r>
-              <a:rPr lang="en-GB" sz="3200" b="0" i="0" noProof="0" dirty="0" err="1">
-                <a:solidFill>
-                  <a:srgbClr val="121212"/>
-                </a:solidFill>
-                <a:effectLst/>
-                <a:latin typeface="Inter"/>
-              </a:rPr>
-              <a:t>Lõputöö</a:t>
-            </a:r>
-            <a:r>
-              <a:rPr lang="en-GB" sz="3200" b="0" i="0" noProof="0" dirty="0">
-                <a:solidFill>
-                  <a:srgbClr val="121212"/>
-                </a:solidFill>
-                <a:effectLst/>
-                <a:latin typeface="Inter"/>
-              </a:rPr>
-              <a:t> </a:t>
-            </a:r>
-            <a:r>
-              <a:rPr lang="en-GB" sz="3200" b="0" i="0" noProof="0" dirty="0" err="1">
-                <a:solidFill>
-                  <a:srgbClr val="121212"/>
-                </a:solidFill>
-                <a:effectLst/>
-                <a:latin typeface="Inter"/>
-              </a:rPr>
-              <a:t>osad</a:t>
-            </a:r>
-            <a:r>
-              <a:rPr lang="en-GB" sz="3200" b="0" i="0" noProof="0" dirty="0">
-                <a:solidFill>
-                  <a:srgbClr val="121212"/>
-                </a:solidFill>
-                <a:effectLst/>
-                <a:latin typeface="Inter"/>
-              </a:rPr>
-              <a:t> </a:t>
-            </a:r>
-            <a:r>
-              <a:rPr lang="en-GB" sz="3200" b="0" i="0" noProof="0" dirty="0" err="1">
-                <a:solidFill>
-                  <a:srgbClr val="121212"/>
-                </a:solidFill>
-                <a:effectLst/>
-                <a:latin typeface="Inter"/>
-              </a:rPr>
-              <a:t>ja</a:t>
-            </a:r>
-            <a:r>
-              <a:rPr lang="en-GB" sz="3200" b="0" i="0" noProof="0" dirty="0">
-                <a:solidFill>
-                  <a:srgbClr val="121212"/>
-                </a:solidFill>
-                <a:effectLst/>
-                <a:latin typeface="Inter"/>
-              </a:rPr>
-              <a:t> </a:t>
-            </a:r>
-            <a:r>
-              <a:rPr lang="en-GB" sz="3200" b="0" i="0" noProof="0" dirty="0" err="1">
-                <a:solidFill>
-                  <a:srgbClr val="121212"/>
-                </a:solidFill>
-                <a:effectLst/>
-                <a:latin typeface="Inter"/>
-              </a:rPr>
-              <a:t>ajakava</a:t>
-            </a:r>
-            <a:endParaRPr lang="en-GB" sz="3200" b="0" i="0" noProof="0" dirty="0">
+            <a:endParaRPr lang="en-GB" sz="2400" b="0" i="0" noProof="0" dirty="0">
               <a:solidFill>
                 <a:srgbClr val="121212"/>
               </a:solidFill>
@@ -12708,61 +12584,11 @@
             </a:endParaRPr>
           </a:p>
           <a:p>
-            <a:pPr marL="800100" lvl="1" indent="-342900">
+            <a:pPr marL="342900" indent="-342900">
               <a:buFont typeface="Arial" panose="020B0604020202020204" pitchFamily="34" charset="0"/>
               <a:buChar char="•"/>
             </a:pPr>
-            <a:r>
-              <a:rPr lang="en-GB" sz="3200" b="0" i="0" noProof="0" dirty="0" err="1">
-                <a:solidFill>
-                  <a:srgbClr val="121212"/>
-                </a:solidFill>
-                <a:effectLst/>
-                <a:latin typeface="Inter"/>
-              </a:rPr>
-              <a:t>teemade</a:t>
-            </a:r>
-            <a:r>
-              <a:rPr lang="en-GB" sz="3200" b="0" i="0" noProof="0" dirty="0">
-                <a:solidFill>
-                  <a:srgbClr val="121212"/>
-                </a:solidFill>
-                <a:effectLst/>
-                <a:latin typeface="Inter"/>
-              </a:rPr>
-              <a:t> </a:t>
-            </a:r>
-            <a:r>
-              <a:rPr lang="en-GB" sz="3200" b="0" i="0" noProof="0" dirty="0" err="1">
-                <a:solidFill>
-                  <a:srgbClr val="121212"/>
-                </a:solidFill>
-                <a:effectLst/>
-                <a:latin typeface="Inter"/>
-              </a:rPr>
-              <a:t>valiku</a:t>
-            </a:r>
-            <a:r>
-              <a:rPr lang="en-GB" sz="3200" b="0" i="0" noProof="0" dirty="0">
-                <a:solidFill>
-                  <a:srgbClr val="121212"/>
-                </a:solidFill>
-                <a:effectLst/>
-                <a:latin typeface="Inter"/>
-              </a:rPr>
-              <a:t> </a:t>
-            </a:r>
-            <a:r>
-              <a:rPr lang="en-GB" sz="3200" b="0" i="0" noProof="0" dirty="0" err="1">
-                <a:solidFill>
-                  <a:srgbClr val="121212"/>
-                </a:solidFill>
-                <a:effectLst/>
-                <a:latin typeface="Inter"/>
-              </a:rPr>
-              <a:t>kinnitamine</a:t>
-            </a:r>
-            <a:endParaRPr lang="en-GB" sz="3200" dirty="0">
+            <a:endParaRPr lang="en-GB" sz="2400" dirty="0">
               <a:solidFill>
                 <a:srgbClr val="121212"/>
               </a:solidFill>
@@ -12770,22 +12596,84 @@
             </a:endParaRPr>
           </a:p>
           <a:p>
+            <a:pPr marL="342900" indent="-342900">
+              <a:buFont typeface="Arial" panose="020B0604020202020204" pitchFamily="34" charset="0"/>
+              <a:buChar char="•"/>
+            </a:pPr>
+            <a:r>
+              <a:rPr lang="en-GB" sz="2400" b="0" i="0" noProof="0" dirty="0" err="1">
+                <a:solidFill>
+                  <a:srgbClr val="121212"/>
+                </a:solidFill>
+                <a:effectLst/>
+                <a:latin typeface="Inter"/>
+              </a:rPr>
+              <a:t>Lõputööde</a:t>
+            </a:r>
+            <a:r>
+              <a:rPr lang="en-GB" sz="2400" b="0" i="0" noProof="0" dirty="0">
+                <a:solidFill>
+                  <a:srgbClr val="121212"/>
+                </a:solidFill>
+                <a:effectLst/>
+                <a:latin typeface="Inter"/>
+              </a:rPr>
+              <a:t> </a:t>
+            </a:r>
+            <a:r>
+              <a:rPr lang="en-GB" sz="2400" b="0" i="0" noProof="0" dirty="0" err="1">
+                <a:solidFill>
+                  <a:srgbClr val="121212"/>
+                </a:solidFill>
+                <a:effectLst/>
+                <a:latin typeface="Inter"/>
+              </a:rPr>
+              <a:t>arutelu</a:t>
+            </a:r>
+            <a:r>
+              <a:rPr lang="en-GB" sz="2400" b="0" i="0" noProof="0" dirty="0">
+                <a:solidFill>
+                  <a:srgbClr val="121212"/>
+                </a:solidFill>
+                <a:effectLst/>
+                <a:latin typeface="Inter"/>
+              </a:rPr>
+              <a:t> 18.09 </a:t>
+            </a:r>
+            <a:r>
+              <a:rPr lang="en-GB" sz="2400" b="0" i="0" noProof="0" dirty="0" err="1">
+                <a:solidFill>
+                  <a:srgbClr val="121212"/>
+                </a:solidFill>
+                <a:effectLst/>
+                <a:latin typeface="Inter"/>
+              </a:rPr>
+              <a:t>tähtaeg</a:t>
+            </a:r>
+            <a:endParaRPr lang="en-GB" sz="2400" dirty="0">
+              <a:solidFill>
+                <a:srgbClr val="121212"/>
+              </a:solidFill>
+              <a:latin typeface="Inter"/>
+            </a:endParaRPr>
+          </a:p>
+          <a:p>
             <a:pPr marL="800100" lvl="1" indent="-342900">
               <a:buFont typeface="Arial" panose="020B0604020202020204" pitchFamily="34" charset="0"/>
               <a:buChar char="•"/>
             </a:pPr>
             <a:r>
-              <a:rPr lang="en-GB" sz="3200" b="0" i="0" noProof="0" dirty="0" err="1">
+              <a:rPr lang="en-GB" sz="2400" b="0" i="0" noProof="0" dirty="0" err="1">
                 <a:solidFill>
                   <a:srgbClr val="121212"/>
                 </a:solidFill>
                 <a:effectLst/>
                 <a:latin typeface="Inter"/>
               </a:rPr>
-              <a:t>konsultatsiooni</a:t>
-            </a:r>
-            <a:r>
-              <a:rPr lang="en-GB" sz="3200" b="0" i="0" noProof="0" dirty="0">
+              <a:t>Lõputöö</a:t>
+            </a:r>
+            <a:r>
+              <a:rPr lang="en-GB" sz="2400" b="0" i="0" noProof="0" dirty="0">
                 <a:solidFill>
                   <a:srgbClr val="121212"/>
                 </a:solidFill>
@@ -12795,17 +12683,17 @@
               <a:t> </a:t>
             </a:r>
             <a:r>
-              <a:rPr lang="en-GB" sz="3200" b="0" i="0" noProof="0" dirty="0" err="1">
+              <a:rPr lang="en-GB" sz="2400" b="0" i="0" noProof="0" dirty="0" err="1">
                 <a:solidFill>
                   <a:srgbClr val="121212"/>
                 </a:solidFill>
                 <a:effectLst/>
                 <a:latin typeface="Inter"/>
               </a:rPr>
-              <a:t>aegade</a:t>
-            </a:r>
-            <a:r>
-              <a:rPr lang="en-GB" sz="3200" b="0" i="0" noProof="0" dirty="0">
+              <a:t>osad</a:t>
+            </a:r>
+            <a:r>
+              <a:rPr lang="en-GB" sz="2400" b="0" i="0" noProof="0" dirty="0">
                 <a:solidFill>
                   <a:srgbClr val="121212"/>
                 </a:solidFill>
@@ -12815,16 +12703,1078 @@
               <a:t> </a:t>
             </a:r>
             <a:r>
-              <a:rPr lang="en-GB" sz="3200" b="0" i="0" noProof="0" dirty="0" err="1">
+              <a:rPr lang="en-GB" sz="2400" b="0" i="0" noProof="0" dirty="0" err="1">
                 <a:solidFill>
                   <a:srgbClr val="121212"/>
                 </a:solidFill>
                 <a:effectLst/>
                 <a:latin typeface="Inter"/>
               </a:rPr>
+              <a:t>ja</a:t>
+            </a:r>
+            <a:r>
+              <a:rPr lang="en-GB" sz="2400" b="0" i="0" noProof="0" dirty="0">
+                <a:solidFill>
+                  <a:srgbClr val="121212"/>
+                </a:solidFill>
+                <a:effectLst/>
+                <a:latin typeface="Inter"/>
+              </a:rPr>
+              <a:t> </a:t>
+            </a:r>
+            <a:r>
+              <a:rPr lang="en-GB" sz="2400" b="0" i="0" noProof="0" dirty="0" err="1">
+                <a:solidFill>
+                  <a:srgbClr val="121212"/>
+                </a:solidFill>
+                <a:effectLst/>
+                <a:latin typeface="Inter"/>
+              </a:rPr>
+              <a:t>ajakava</a:t>
+            </a:r>
+            <a:endParaRPr lang="en-GB" sz="2400" b="0" i="0" noProof="0" dirty="0">
+              <a:solidFill>
+                <a:srgbClr val="121212"/>
+              </a:solidFill>
+              <a:effectLst/>
+              <a:latin typeface="Inter"/>
+            </a:endParaRPr>
+          </a:p>
+          <a:p>
+            <a:pPr marL="800100" lvl="1" indent="-342900">
+              <a:buFont typeface="Arial" panose="020B0604020202020204" pitchFamily="34" charset="0"/>
+              <a:buChar char="•"/>
+            </a:pPr>
+            <a:r>
+              <a:rPr lang="en-GB" sz="2400" dirty="0">
+                <a:solidFill>
+                  <a:srgbClr val="121212"/>
+                </a:solidFill>
+                <a:latin typeface="Inter"/>
+              </a:rPr>
+              <a:t>T</a:t>
+            </a:r>
+            <a:r>
+              <a:rPr lang="en-GB" sz="2400" b="0" i="0" noProof="0" dirty="0" err="1">
+                <a:solidFill>
+                  <a:srgbClr val="121212"/>
+                </a:solidFill>
+                <a:effectLst/>
+                <a:latin typeface="Inter"/>
+              </a:rPr>
+              <a:t>eemade</a:t>
+            </a:r>
+            <a:r>
+              <a:rPr lang="en-GB" sz="2400" b="0" i="0" noProof="0" dirty="0">
+                <a:solidFill>
+                  <a:srgbClr val="121212"/>
+                </a:solidFill>
+                <a:effectLst/>
+                <a:latin typeface="Inter"/>
+              </a:rPr>
+              <a:t> </a:t>
+            </a:r>
+            <a:r>
+              <a:rPr lang="en-GB" sz="2400" b="0" i="0" noProof="0" dirty="0" err="1">
+                <a:solidFill>
+                  <a:srgbClr val="121212"/>
+                </a:solidFill>
+                <a:effectLst/>
+                <a:latin typeface="Inter"/>
+              </a:rPr>
+              <a:t>valiku</a:t>
+            </a:r>
+            <a:r>
+              <a:rPr lang="en-GB" sz="2400" b="0" i="0" noProof="0" dirty="0">
+                <a:solidFill>
+                  <a:srgbClr val="121212"/>
+                </a:solidFill>
+                <a:effectLst/>
+                <a:latin typeface="Inter"/>
+              </a:rPr>
+              <a:t> </a:t>
+            </a:r>
+            <a:r>
+              <a:rPr lang="en-GB" sz="2400" b="0" i="0" noProof="0" dirty="0" err="1">
+                <a:solidFill>
+                  <a:srgbClr val="121212"/>
+                </a:solidFill>
+                <a:effectLst/>
+                <a:latin typeface="Inter"/>
+              </a:rPr>
+              <a:t>kinnitamine</a:t>
+            </a:r>
+            <a:endParaRPr lang="en-GB" sz="2400" b="0" i="0" noProof="0" dirty="0">
+              <a:solidFill>
+                <a:srgbClr val="121212"/>
+              </a:solidFill>
+              <a:effectLst/>
+              <a:latin typeface="Inter"/>
+            </a:endParaRPr>
+          </a:p>
+          <a:p>
+            <a:pPr marL="1257300" lvl="2" indent="-342900">
+              <a:buFont typeface="Arial" panose="020B0604020202020204" pitchFamily="34" charset="0"/>
+              <a:buChar char="•"/>
+            </a:pPr>
+            <a:r>
+              <a:rPr lang="en-GB" sz="2400" dirty="0" err="1">
+                <a:solidFill>
+                  <a:srgbClr val="121212"/>
+                </a:solidFill>
+                <a:latin typeface="Inter"/>
+              </a:rPr>
+              <a:t>Oluline</a:t>
+            </a:r>
+            <a:r>
+              <a:rPr lang="en-GB" sz="2400" dirty="0">
+                <a:solidFill>
+                  <a:srgbClr val="121212"/>
+                </a:solidFill>
+                <a:latin typeface="Inter"/>
+              </a:rPr>
+              <a:t> on </a:t>
+            </a:r>
+            <a:r>
+              <a:rPr lang="en-GB" sz="2400" dirty="0" err="1">
+                <a:solidFill>
+                  <a:srgbClr val="121212"/>
+                </a:solidFill>
+                <a:latin typeface="Inter"/>
+              </a:rPr>
+              <a:t>praktiseerida</a:t>
+            </a:r>
+            <a:r>
+              <a:rPr lang="en-GB" sz="2400" dirty="0">
+                <a:solidFill>
+                  <a:srgbClr val="121212"/>
+                </a:solidFill>
+                <a:latin typeface="Inter"/>
+              </a:rPr>
+              <a:t> </a:t>
+            </a:r>
+            <a:r>
+              <a:rPr lang="en-GB" sz="2400" dirty="0" err="1">
+                <a:solidFill>
+                  <a:srgbClr val="121212"/>
+                </a:solidFill>
+                <a:latin typeface="Inter"/>
+              </a:rPr>
+              <a:t>andmetega</a:t>
+            </a:r>
+            <a:r>
+              <a:rPr lang="en-GB" sz="2400" dirty="0">
+                <a:solidFill>
+                  <a:srgbClr val="121212"/>
+                </a:solidFill>
+                <a:latin typeface="Inter"/>
+              </a:rPr>
+              <a:t> </a:t>
+            </a:r>
+            <a:r>
+              <a:rPr lang="en-GB" sz="2400" dirty="0" err="1">
+                <a:solidFill>
+                  <a:srgbClr val="121212"/>
+                </a:solidFill>
+                <a:latin typeface="Inter"/>
+              </a:rPr>
+              <a:t>töötamise</a:t>
+            </a:r>
+            <a:r>
+              <a:rPr lang="en-GB" sz="2400" dirty="0">
+                <a:solidFill>
+                  <a:srgbClr val="121212"/>
+                </a:solidFill>
+                <a:latin typeface="Inter"/>
+              </a:rPr>
+              <a:t> </a:t>
+            </a:r>
+            <a:r>
+              <a:rPr lang="en-GB" sz="2400" dirty="0" err="1">
+                <a:solidFill>
+                  <a:srgbClr val="121212"/>
+                </a:solidFill>
+                <a:latin typeface="Inter"/>
+              </a:rPr>
+              <a:t>oskuseid</a:t>
+            </a:r>
+            <a:endParaRPr lang="en-GB" sz="2400" dirty="0">
+              <a:solidFill>
+                <a:srgbClr val="121212"/>
+              </a:solidFill>
+              <a:latin typeface="Inter"/>
+            </a:endParaRPr>
+          </a:p>
+          <a:p>
+            <a:pPr marL="1257300" lvl="2" indent="-342900">
+              <a:buFont typeface="Arial" panose="020B0604020202020204" pitchFamily="34" charset="0"/>
+              <a:buChar char="•"/>
+            </a:pPr>
+            <a:r>
+              <a:rPr lang="en-GB" sz="2400" dirty="0" err="1">
+                <a:solidFill>
+                  <a:srgbClr val="121212"/>
+                </a:solidFill>
+                <a:latin typeface="Inter"/>
+              </a:rPr>
+              <a:t>Töö</a:t>
+            </a:r>
+            <a:r>
+              <a:rPr lang="en-GB" sz="2400" dirty="0">
+                <a:solidFill>
+                  <a:srgbClr val="121212"/>
+                </a:solidFill>
+                <a:latin typeface="Inter"/>
+              </a:rPr>
+              <a:t> </a:t>
+            </a:r>
+            <a:r>
+              <a:rPr lang="en-GB" sz="2400" dirty="0" err="1">
+                <a:solidFill>
+                  <a:srgbClr val="121212"/>
+                </a:solidFill>
+                <a:latin typeface="Inter"/>
+              </a:rPr>
+              <a:t>peab</a:t>
+            </a:r>
+            <a:r>
+              <a:rPr lang="en-GB" sz="2400" dirty="0">
+                <a:solidFill>
+                  <a:srgbClr val="121212"/>
+                </a:solidFill>
+                <a:latin typeface="Inter"/>
+              </a:rPr>
+              <a:t> </a:t>
+            </a:r>
+            <a:r>
+              <a:rPr lang="en-GB" sz="2400" dirty="0" err="1">
+                <a:solidFill>
+                  <a:srgbClr val="121212"/>
+                </a:solidFill>
+                <a:latin typeface="Inter"/>
+              </a:rPr>
+              <a:t>sisaldama</a:t>
+            </a:r>
+            <a:r>
+              <a:rPr lang="en-GB" sz="2400" dirty="0">
+                <a:solidFill>
+                  <a:srgbClr val="121212"/>
+                </a:solidFill>
+                <a:latin typeface="Inter"/>
+              </a:rPr>
+              <a:t> </a:t>
+            </a:r>
+            <a:r>
+              <a:rPr lang="en-GB" sz="2400" dirty="0" err="1">
+                <a:solidFill>
+                  <a:srgbClr val="121212"/>
+                </a:solidFill>
+                <a:latin typeface="Inter"/>
+              </a:rPr>
+              <a:t>kõiki</a:t>
+            </a:r>
+            <a:r>
+              <a:rPr lang="en-GB" sz="2400" dirty="0">
+                <a:solidFill>
+                  <a:srgbClr val="121212"/>
+                </a:solidFill>
+                <a:latin typeface="Inter"/>
+              </a:rPr>
+              <a:t> </a:t>
+            </a:r>
+            <a:r>
+              <a:rPr lang="en-GB" sz="2400" dirty="0" err="1">
+                <a:solidFill>
+                  <a:srgbClr val="121212"/>
+                </a:solidFill>
+                <a:latin typeface="Inter"/>
+              </a:rPr>
+              <a:t>osi</a:t>
+            </a:r>
+            <a:r>
+              <a:rPr lang="en-GB" sz="2400" dirty="0">
+                <a:solidFill>
+                  <a:srgbClr val="121212"/>
+                </a:solidFill>
+                <a:latin typeface="Inter"/>
+              </a:rPr>
+              <a:t>:</a:t>
+            </a:r>
+          </a:p>
+          <a:p>
+            <a:pPr marL="1714500" lvl="3" indent="-342900">
+              <a:buFont typeface="Arial" panose="020B0604020202020204" pitchFamily="34" charset="0"/>
+              <a:buChar char="•"/>
+            </a:pPr>
+            <a:r>
+              <a:rPr lang="en-GB" sz="2400" dirty="0" err="1">
+                <a:solidFill>
+                  <a:srgbClr val="121212"/>
+                </a:solidFill>
+                <a:latin typeface="Inter"/>
+              </a:rPr>
+              <a:t>Andmete</a:t>
+            </a:r>
+            <a:r>
+              <a:rPr lang="en-GB" sz="2400" dirty="0">
+                <a:solidFill>
+                  <a:srgbClr val="121212"/>
+                </a:solidFill>
+                <a:latin typeface="Inter"/>
+              </a:rPr>
+              <a:t> import (kas python, fail, API)</a:t>
+            </a:r>
+          </a:p>
+          <a:p>
+            <a:pPr marL="1714500" lvl="3" indent="-342900">
+              <a:buFont typeface="Arial" panose="020B0604020202020204" pitchFamily="34" charset="0"/>
+              <a:buChar char="•"/>
+            </a:pPr>
+            <a:r>
+              <a:rPr lang="en-GB" sz="2400" dirty="0" err="1">
+                <a:solidFill>
+                  <a:srgbClr val="121212"/>
+                </a:solidFill>
+                <a:latin typeface="Inter"/>
+              </a:rPr>
+              <a:t>Andmete</a:t>
+            </a:r>
+            <a:r>
+              <a:rPr lang="en-GB" sz="2400" dirty="0">
+                <a:solidFill>
+                  <a:srgbClr val="121212"/>
+                </a:solidFill>
+                <a:latin typeface="Inter"/>
+              </a:rPr>
+              <a:t> </a:t>
+            </a:r>
+            <a:r>
+              <a:rPr lang="en-GB" sz="2400" dirty="0" err="1">
+                <a:solidFill>
+                  <a:srgbClr val="121212"/>
+                </a:solidFill>
+                <a:latin typeface="Inter"/>
+              </a:rPr>
+              <a:t>töötlemine</a:t>
+            </a:r>
+            <a:r>
+              <a:rPr lang="en-GB" sz="2400" dirty="0">
+                <a:solidFill>
+                  <a:srgbClr val="121212"/>
+                </a:solidFill>
+                <a:latin typeface="Inter"/>
+              </a:rPr>
+              <a:t> (python/SQL, M keel, DAX)</a:t>
+            </a:r>
+          </a:p>
+          <a:p>
+            <a:pPr marL="1714500" lvl="3" indent="-342900">
+              <a:buFont typeface="Arial" panose="020B0604020202020204" pitchFamily="34" charset="0"/>
+              <a:buChar char="•"/>
+            </a:pPr>
+            <a:r>
+              <a:rPr lang="en-GB" sz="2400" dirty="0" err="1">
+                <a:solidFill>
+                  <a:srgbClr val="121212"/>
+                </a:solidFill>
+                <a:latin typeface="Inter"/>
+              </a:rPr>
+              <a:t>Andmete</a:t>
+            </a:r>
+            <a:r>
+              <a:rPr lang="en-GB" sz="2400" dirty="0">
+                <a:solidFill>
+                  <a:srgbClr val="121212"/>
+                </a:solidFill>
+                <a:latin typeface="Inter"/>
+              </a:rPr>
+              <a:t> </a:t>
+            </a:r>
+            <a:r>
+              <a:rPr lang="en-GB" sz="2400" dirty="0" err="1">
+                <a:solidFill>
+                  <a:srgbClr val="121212"/>
+                </a:solidFill>
+                <a:latin typeface="Inter"/>
+              </a:rPr>
+              <a:t>salvestamine</a:t>
+            </a:r>
+            <a:r>
+              <a:rPr lang="en-GB" sz="2400" dirty="0">
+                <a:solidFill>
+                  <a:srgbClr val="121212"/>
+                </a:solidFill>
+                <a:latin typeface="Inter"/>
+              </a:rPr>
+              <a:t> PostgreSQL (</a:t>
+            </a:r>
+            <a:r>
+              <a:rPr lang="en-GB" sz="2400" dirty="0" err="1">
+                <a:solidFill>
+                  <a:srgbClr val="121212"/>
+                </a:solidFill>
+                <a:latin typeface="Inter"/>
+              </a:rPr>
+              <a:t>vm</a:t>
+            </a:r>
+            <a:r>
+              <a:rPr lang="en-GB" sz="2400" dirty="0">
+                <a:solidFill>
+                  <a:srgbClr val="121212"/>
+                </a:solidFill>
+                <a:latin typeface="Inter"/>
+              </a:rPr>
+              <a:t> </a:t>
+            </a:r>
+            <a:r>
+              <a:rPr lang="en-GB" sz="2400" dirty="0" err="1">
+                <a:solidFill>
+                  <a:srgbClr val="121212"/>
+                </a:solidFill>
+                <a:latin typeface="Inter"/>
+              </a:rPr>
+              <a:t>kui</a:t>
+            </a:r>
+            <a:r>
+              <a:rPr lang="en-GB" sz="2400" dirty="0">
+                <a:solidFill>
+                  <a:srgbClr val="121212"/>
+                </a:solidFill>
+                <a:latin typeface="Inter"/>
+              </a:rPr>
+              <a:t> </a:t>
+            </a:r>
+            <a:r>
+              <a:rPr lang="en-GB" sz="2400" dirty="0" err="1">
+                <a:solidFill>
+                  <a:srgbClr val="121212"/>
+                </a:solidFill>
+                <a:latin typeface="Inter"/>
+              </a:rPr>
+              <a:t>võimalik</a:t>
+            </a:r>
+            <a:r>
+              <a:rPr lang="en-GB" sz="2400" dirty="0">
+                <a:solidFill>
+                  <a:srgbClr val="121212"/>
+                </a:solidFill>
+                <a:latin typeface="Inter"/>
+              </a:rPr>
+              <a:t>)</a:t>
+            </a:r>
+          </a:p>
+          <a:p>
+            <a:pPr marL="1714500" lvl="3" indent="-342900">
+              <a:buFont typeface="Arial" panose="020B0604020202020204" pitchFamily="34" charset="0"/>
+              <a:buChar char="•"/>
+            </a:pPr>
+            <a:r>
+              <a:rPr lang="en-GB" sz="2400" dirty="0" err="1">
+                <a:solidFill>
+                  <a:srgbClr val="121212"/>
+                </a:solidFill>
+                <a:latin typeface="Inter"/>
+              </a:rPr>
+              <a:t>Andmete</a:t>
+            </a:r>
+            <a:r>
+              <a:rPr lang="en-GB" sz="2400" dirty="0">
+                <a:solidFill>
+                  <a:srgbClr val="121212"/>
+                </a:solidFill>
+                <a:latin typeface="Inter"/>
+              </a:rPr>
+              <a:t> </a:t>
+            </a:r>
+            <a:r>
+              <a:rPr lang="en-GB" sz="2400" dirty="0" err="1">
+                <a:solidFill>
+                  <a:srgbClr val="121212"/>
+                </a:solidFill>
+                <a:latin typeface="Inter"/>
+              </a:rPr>
+              <a:t>visualiseerimine</a:t>
+            </a:r>
+            <a:r>
+              <a:rPr lang="en-GB" sz="2400" dirty="0">
+                <a:solidFill>
+                  <a:srgbClr val="121212"/>
+                </a:solidFill>
+                <a:latin typeface="Inter"/>
+              </a:rPr>
+              <a:t> (Power BI) </a:t>
+            </a:r>
+            <a:r>
+              <a:rPr lang="en-GB" sz="2400" dirty="0" err="1">
+                <a:solidFill>
+                  <a:srgbClr val="121212"/>
+                </a:solidFill>
+                <a:latin typeface="Inter"/>
+              </a:rPr>
+              <a:t>võib</a:t>
+            </a:r>
+            <a:r>
+              <a:rPr lang="en-GB" sz="2400" dirty="0">
+                <a:solidFill>
+                  <a:srgbClr val="121212"/>
+                </a:solidFill>
+                <a:latin typeface="Inter"/>
+              </a:rPr>
+              <a:t> </a:t>
+            </a:r>
+            <a:r>
+              <a:rPr lang="en-GB" sz="2400" dirty="0" err="1">
+                <a:solidFill>
+                  <a:srgbClr val="121212"/>
+                </a:solidFill>
+                <a:latin typeface="Inter"/>
+              </a:rPr>
+              <a:t>lisaks</a:t>
+            </a:r>
+            <a:r>
+              <a:rPr lang="en-GB" sz="2400" dirty="0">
+                <a:solidFill>
+                  <a:srgbClr val="121212"/>
+                </a:solidFill>
+                <a:latin typeface="Inter"/>
+              </a:rPr>
+              <a:t> ka python </a:t>
+            </a:r>
+            <a:r>
+              <a:rPr lang="en-GB" sz="2400" dirty="0" err="1">
+                <a:solidFill>
+                  <a:srgbClr val="121212"/>
+                </a:solidFill>
+                <a:latin typeface="Inter"/>
+              </a:rPr>
+              <a:t>äppi</a:t>
+            </a:r>
+            <a:r>
+              <a:rPr lang="en-GB" sz="2400" dirty="0">
+                <a:solidFill>
+                  <a:srgbClr val="121212"/>
+                </a:solidFill>
+                <a:latin typeface="Inter"/>
+              </a:rPr>
+              <a:t> </a:t>
+            </a:r>
+            <a:r>
+              <a:rPr lang="en-GB" sz="2400" dirty="0" err="1">
+                <a:solidFill>
+                  <a:srgbClr val="121212"/>
+                </a:solidFill>
+                <a:latin typeface="Inter"/>
+              </a:rPr>
+              <a:t>teha</a:t>
+            </a:r>
+            <a:endParaRPr lang="en-GB" sz="2400" dirty="0">
+              <a:solidFill>
+                <a:srgbClr val="121212"/>
+              </a:solidFill>
+              <a:latin typeface="Inter"/>
+            </a:endParaRPr>
+          </a:p>
+          <a:p>
+            <a:pPr marL="1714500" lvl="3" indent="-342900">
+              <a:buFont typeface="Arial" panose="020B0604020202020204" pitchFamily="34" charset="0"/>
+              <a:buChar char="•"/>
+            </a:pPr>
+            <a:r>
+              <a:rPr lang="en-GB" sz="2400" dirty="0">
+                <a:solidFill>
+                  <a:srgbClr val="121212"/>
+                </a:solidFill>
+                <a:latin typeface="Inter"/>
+              </a:rPr>
+              <a:t>Git </a:t>
+            </a:r>
+            <a:r>
+              <a:rPr lang="en-GB" sz="2400" dirty="0" err="1">
+                <a:solidFill>
+                  <a:srgbClr val="121212"/>
+                </a:solidFill>
+                <a:latin typeface="Inter"/>
+              </a:rPr>
+              <a:t>kasutamine</a:t>
+            </a:r>
+            <a:r>
+              <a:rPr lang="en-GB" sz="2400" dirty="0">
+                <a:solidFill>
+                  <a:srgbClr val="121212"/>
+                </a:solidFill>
+                <a:latin typeface="Inter"/>
+              </a:rPr>
+              <a:t> (</a:t>
+            </a:r>
+            <a:r>
+              <a:rPr lang="en-GB" sz="2400" dirty="0" err="1">
+                <a:solidFill>
+                  <a:srgbClr val="121212"/>
+                </a:solidFill>
+                <a:latin typeface="Inter"/>
+              </a:rPr>
+              <a:t>github</a:t>
+            </a:r>
+            <a:r>
+              <a:rPr lang="en-GB" sz="2400" dirty="0">
+                <a:solidFill>
+                  <a:srgbClr val="121212"/>
+                </a:solidFill>
+                <a:latin typeface="Inter"/>
+              </a:rPr>
+              <a:t> </a:t>
+            </a:r>
+            <a:r>
+              <a:rPr lang="en-GB" sz="2400" dirty="0" err="1">
+                <a:solidFill>
+                  <a:srgbClr val="121212"/>
+                </a:solidFill>
+                <a:latin typeface="Inter"/>
+              </a:rPr>
+              <a:t>või</a:t>
+            </a:r>
+            <a:r>
+              <a:rPr lang="en-GB" sz="2400" dirty="0">
+                <a:solidFill>
+                  <a:srgbClr val="121212"/>
+                </a:solidFill>
+                <a:latin typeface="Inter"/>
+              </a:rPr>
+              <a:t> </a:t>
+            </a:r>
+            <a:r>
+              <a:rPr lang="en-GB" sz="2400" dirty="0" err="1">
+                <a:solidFill>
+                  <a:srgbClr val="121212"/>
+                </a:solidFill>
+                <a:latin typeface="Inter"/>
+              </a:rPr>
+              <a:t>mõni</a:t>
+            </a:r>
+            <a:r>
+              <a:rPr lang="en-GB" sz="2400" dirty="0">
+                <a:solidFill>
+                  <a:srgbClr val="121212"/>
+                </a:solidFill>
+                <a:latin typeface="Inter"/>
+              </a:rPr>
+              <a:t> </a:t>
+            </a:r>
+            <a:r>
+              <a:rPr lang="en-GB" sz="2400" dirty="0" err="1">
+                <a:solidFill>
+                  <a:srgbClr val="121212"/>
+                </a:solidFill>
+                <a:latin typeface="Inter"/>
+              </a:rPr>
+              <a:t>muu</a:t>
+            </a:r>
+            <a:r>
+              <a:rPr lang="en-GB" sz="2400" dirty="0">
+                <a:solidFill>
+                  <a:srgbClr val="121212"/>
+                </a:solidFill>
+                <a:latin typeface="Inter"/>
+              </a:rPr>
+              <a:t> </a:t>
+            </a:r>
+            <a:r>
+              <a:rPr lang="en-GB" sz="2400" dirty="0" err="1">
+                <a:solidFill>
+                  <a:srgbClr val="121212"/>
+                </a:solidFill>
+                <a:latin typeface="Inter"/>
+              </a:rPr>
+              <a:t>kui</a:t>
+            </a:r>
+            <a:r>
+              <a:rPr lang="en-GB" sz="2400" dirty="0">
+                <a:solidFill>
+                  <a:srgbClr val="121212"/>
+                </a:solidFill>
+                <a:latin typeface="Inter"/>
+              </a:rPr>
+              <a:t> </a:t>
+            </a:r>
+            <a:r>
+              <a:rPr lang="en-GB" sz="2400" dirty="0" err="1">
+                <a:solidFill>
+                  <a:srgbClr val="121212"/>
+                </a:solidFill>
+                <a:latin typeface="Inter"/>
+              </a:rPr>
+              <a:t>soovi</a:t>
+            </a:r>
+            <a:r>
+              <a:rPr lang="en-GB" sz="2400" dirty="0">
+                <a:solidFill>
+                  <a:srgbClr val="121212"/>
+                </a:solidFill>
+                <a:latin typeface="Inter"/>
+              </a:rPr>
+              <a:t> on)</a:t>
+            </a:r>
+          </a:p>
+          <a:p>
+            <a:pPr marL="1257300" lvl="2" indent="-342900">
+              <a:buFont typeface="Arial" panose="020B0604020202020204" pitchFamily="34" charset="0"/>
+              <a:buChar char="•"/>
+            </a:pPr>
+            <a:r>
+              <a:rPr lang="en-GB" sz="2400" dirty="0" err="1">
+                <a:solidFill>
+                  <a:srgbClr val="121212"/>
+                </a:solidFill>
+                <a:latin typeface="Inter"/>
+              </a:rPr>
+              <a:t>Äriküsimus</a:t>
+            </a:r>
+            <a:r>
+              <a:rPr lang="en-GB" sz="2400" dirty="0">
+                <a:solidFill>
+                  <a:srgbClr val="121212"/>
+                </a:solidFill>
+                <a:latin typeface="Inter"/>
+              </a:rPr>
+              <a:t> </a:t>
+            </a:r>
+            <a:r>
+              <a:rPr lang="en-GB" sz="2400" dirty="0" err="1">
+                <a:solidFill>
+                  <a:srgbClr val="121212"/>
+                </a:solidFill>
+                <a:latin typeface="Inter"/>
+              </a:rPr>
+              <a:t>peab</a:t>
+            </a:r>
+            <a:r>
+              <a:rPr lang="en-GB" sz="2400" dirty="0">
+                <a:solidFill>
+                  <a:srgbClr val="121212"/>
+                </a:solidFill>
+                <a:latin typeface="Inter"/>
+              </a:rPr>
+              <a:t> </a:t>
+            </a:r>
+            <a:r>
+              <a:rPr lang="en-GB" sz="2400" dirty="0" err="1">
+                <a:solidFill>
+                  <a:srgbClr val="121212"/>
+                </a:solidFill>
+                <a:latin typeface="Inter"/>
+              </a:rPr>
+              <a:t>olema</a:t>
+            </a:r>
+            <a:r>
+              <a:rPr lang="en-GB" sz="2400" dirty="0">
+                <a:solidFill>
+                  <a:srgbClr val="121212"/>
+                </a:solidFill>
+                <a:latin typeface="Inter"/>
+              </a:rPr>
+              <a:t>, </a:t>
+            </a:r>
+            <a:r>
+              <a:rPr lang="en-GB" sz="2400" dirty="0" err="1">
+                <a:solidFill>
+                  <a:srgbClr val="121212"/>
+                </a:solidFill>
+                <a:latin typeface="Inter"/>
+              </a:rPr>
+              <a:t>kuid</a:t>
+            </a:r>
+            <a:r>
+              <a:rPr lang="en-GB" sz="2400" dirty="0">
+                <a:solidFill>
+                  <a:srgbClr val="121212"/>
+                </a:solidFill>
+                <a:latin typeface="Inter"/>
+              </a:rPr>
+              <a:t> </a:t>
+            </a:r>
+            <a:r>
+              <a:rPr lang="en-GB" sz="2400" dirty="0" err="1">
+                <a:solidFill>
+                  <a:srgbClr val="121212"/>
+                </a:solidFill>
+                <a:latin typeface="Inter"/>
+              </a:rPr>
+              <a:t>sellele</a:t>
+            </a:r>
+            <a:r>
+              <a:rPr lang="en-GB" sz="2400" dirty="0">
+                <a:solidFill>
+                  <a:srgbClr val="121212"/>
+                </a:solidFill>
+                <a:latin typeface="Inter"/>
+              </a:rPr>
+              <a:t> </a:t>
+            </a:r>
+            <a:r>
+              <a:rPr lang="en-GB" sz="2400" dirty="0" err="1">
+                <a:solidFill>
+                  <a:srgbClr val="121212"/>
+                </a:solidFill>
+                <a:latin typeface="Inter"/>
+              </a:rPr>
+              <a:t>vastuse</a:t>
+            </a:r>
+            <a:r>
+              <a:rPr lang="en-GB" sz="2400" dirty="0">
+                <a:solidFill>
+                  <a:srgbClr val="121212"/>
+                </a:solidFill>
+                <a:latin typeface="Inter"/>
+              </a:rPr>
+              <a:t> </a:t>
+            </a:r>
+            <a:r>
+              <a:rPr lang="en-GB" sz="2400" dirty="0" err="1">
+                <a:solidFill>
+                  <a:srgbClr val="121212"/>
+                </a:solidFill>
+                <a:latin typeface="Inter"/>
+              </a:rPr>
+              <a:t>leidmine</a:t>
+            </a:r>
+            <a:r>
+              <a:rPr lang="en-GB" sz="2400" dirty="0">
+                <a:solidFill>
+                  <a:srgbClr val="121212"/>
+                </a:solidFill>
+                <a:latin typeface="Inter"/>
+              </a:rPr>
+              <a:t> </a:t>
+            </a:r>
+            <a:r>
+              <a:rPr lang="en-GB" sz="2400" dirty="0" err="1">
+                <a:solidFill>
+                  <a:srgbClr val="121212"/>
+                </a:solidFill>
+                <a:latin typeface="Inter"/>
+              </a:rPr>
+              <a:t>lisavõimalus</a:t>
+            </a:r>
+            <a:endParaRPr lang="en-GB" sz="2400" dirty="0">
+              <a:solidFill>
+                <a:srgbClr val="121212"/>
+              </a:solidFill>
+              <a:latin typeface="Inter"/>
+            </a:endParaRPr>
+          </a:p>
+          <a:p>
+            <a:pPr marL="800100" lvl="1" indent="-342900">
+              <a:buFont typeface="Arial" panose="020B0604020202020204" pitchFamily="34" charset="0"/>
+              <a:buChar char="•"/>
+            </a:pPr>
+            <a:r>
+              <a:rPr lang="en-GB" sz="2400" dirty="0">
+                <a:solidFill>
+                  <a:srgbClr val="121212"/>
+                </a:solidFill>
+                <a:latin typeface="Inter"/>
+              </a:rPr>
+              <a:t>K</a:t>
+            </a:r>
+            <a:r>
+              <a:rPr lang="en-GB" sz="2400" b="0" i="0" noProof="0" dirty="0" err="1">
+                <a:solidFill>
+                  <a:srgbClr val="121212"/>
+                </a:solidFill>
+                <a:effectLst/>
+                <a:latin typeface="Inter"/>
+              </a:rPr>
+              <a:t>onsultatsiooni</a:t>
+            </a:r>
+            <a:r>
+              <a:rPr lang="en-GB" sz="2400" b="0" i="0" noProof="0" dirty="0">
+                <a:solidFill>
+                  <a:srgbClr val="121212"/>
+                </a:solidFill>
+                <a:effectLst/>
+                <a:latin typeface="Inter"/>
+              </a:rPr>
+              <a:t> </a:t>
+            </a:r>
+            <a:r>
+              <a:rPr lang="en-GB" sz="2400" b="0" i="0" noProof="0" dirty="0" err="1">
+                <a:solidFill>
+                  <a:srgbClr val="121212"/>
+                </a:solidFill>
+                <a:effectLst/>
+                <a:latin typeface="Inter"/>
+              </a:rPr>
+              <a:t>aegade</a:t>
+            </a:r>
+            <a:r>
+              <a:rPr lang="en-GB" sz="2400" b="0" i="0" noProof="0" dirty="0">
+                <a:solidFill>
+                  <a:srgbClr val="121212"/>
+                </a:solidFill>
+                <a:effectLst/>
+                <a:latin typeface="Inter"/>
+              </a:rPr>
+              <a:t> </a:t>
+            </a:r>
+            <a:r>
+              <a:rPr lang="en-GB" sz="2400" b="0" i="0" noProof="0" dirty="0" err="1">
+                <a:solidFill>
+                  <a:srgbClr val="121212"/>
+                </a:solidFill>
+                <a:effectLst/>
+                <a:latin typeface="Inter"/>
+              </a:rPr>
               <a:t>broneerimine</a:t>
             </a:r>
-            <a:endParaRPr lang="en-GB" sz="2400" dirty="0"/>
+            <a:endParaRPr lang="en-GB" sz="2400" b="0" i="0" noProof="0" dirty="0">
+              <a:solidFill>
+                <a:srgbClr val="121212"/>
+              </a:solidFill>
+              <a:effectLst/>
+              <a:latin typeface="Inter"/>
+            </a:endParaRPr>
+          </a:p>
+          <a:p>
+            <a:pPr marL="800100" lvl="1" indent="-342900">
+              <a:buFont typeface="Arial" panose="020B0604020202020204" pitchFamily="34" charset="0"/>
+              <a:buChar char="•"/>
+            </a:pPr>
+            <a:r>
+              <a:rPr lang="en-GB" sz="2400" dirty="0" err="1">
+                <a:solidFill>
+                  <a:srgbClr val="121212"/>
+                </a:solidFill>
+                <a:latin typeface="Inter"/>
+              </a:rPr>
+              <a:t>Töö</a:t>
+            </a:r>
+            <a:r>
+              <a:rPr lang="en-GB" sz="2400" dirty="0">
+                <a:solidFill>
+                  <a:srgbClr val="121212"/>
+                </a:solidFill>
+                <a:latin typeface="Inter"/>
+              </a:rPr>
+              <a:t> </a:t>
+            </a:r>
+            <a:r>
+              <a:rPr lang="en-GB" sz="2400" dirty="0" err="1">
+                <a:solidFill>
+                  <a:srgbClr val="121212"/>
+                </a:solidFill>
+                <a:latin typeface="Inter"/>
+              </a:rPr>
+              <a:t>kohapeal</a:t>
+            </a:r>
+            <a:r>
+              <a:rPr lang="en-GB" sz="2400" dirty="0">
+                <a:solidFill>
+                  <a:srgbClr val="121212"/>
+                </a:solidFill>
+                <a:latin typeface="Inter"/>
+              </a:rPr>
+              <a:t> </a:t>
+            </a:r>
+            <a:r>
+              <a:rPr lang="en-GB" sz="2400" dirty="0" err="1">
+                <a:solidFill>
+                  <a:srgbClr val="121212"/>
+                </a:solidFill>
+                <a:latin typeface="Inter"/>
+              </a:rPr>
+              <a:t>samas</a:t>
+            </a:r>
+            <a:r>
+              <a:rPr lang="en-GB" sz="2400" dirty="0">
+                <a:solidFill>
+                  <a:srgbClr val="121212"/>
+                </a:solidFill>
+                <a:latin typeface="Inter"/>
+              </a:rPr>
+              <a:t> </a:t>
+            </a:r>
+            <a:r>
+              <a:rPr lang="en-GB" sz="2400" dirty="0" err="1">
+                <a:solidFill>
+                  <a:srgbClr val="121212"/>
+                </a:solidFill>
+                <a:latin typeface="Inter"/>
+              </a:rPr>
+              <a:t>ruumis</a:t>
+            </a:r>
+            <a:r>
+              <a:rPr lang="en-GB" sz="2400" dirty="0">
+                <a:solidFill>
+                  <a:srgbClr val="121212"/>
+                </a:solidFill>
+                <a:latin typeface="Inter"/>
+              </a:rPr>
+              <a:t>, </a:t>
+            </a:r>
+            <a:r>
+              <a:rPr lang="en-GB" sz="2400" dirty="0" err="1">
+                <a:solidFill>
+                  <a:srgbClr val="121212"/>
+                </a:solidFill>
+                <a:latin typeface="Inter"/>
+              </a:rPr>
+              <a:t>laudu</a:t>
+            </a:r>
+            <a:r>
+              <a:rPr lang="en-GB" sz="2400" dirty="0">
+                <a:solidFill>
+                  <a:srgbClr val="121212"/>
+                </a:solidFill>
+                <a:latin typeface="Inter"/>
+              </a:rPr>
+              <a:t> </a:t>
+            </a:r>
+            <a:r>
+              <a:rPr lang="en-GB" sz="2400" dirty="0" err="1">
+                <a:solidFill>
+                  <a:srgbClr val="121212"/>
+                </a:solidFill>
+                <a:latin typeface="Inter"/>
+              </a:rPr>
+              <a:t>võib</a:t>
+            </a:r>
+            <a:r>
+              <a:rPr lang="en-GB" sz="2400" dirty="0">
+                <a:solidFill>
+                  <a:srgbClr val="121212"/>
+                </a:solidFill>
+                <a:latin typeface="Inter"/>
+              </a:rPr>
+              <a:t> </a:t>
+            </a:r>
+            <a:r>
+              <a:rPr lang="en-GB" sz="2400" dirty="0" err="1">
+                <a:solidFill>
+                  <a:srgbClr val="121212"/>
+                </a:solidFill>
+                <a:latin typeface="Inter"/>
+              </a:rPr>
+              <a:t>ringi</a:t>
+            </a:r>
+            <a:r>
+              <a:rPr lang="en-GB" sz="2400" dirty="0">
+                <a:solidFill>
+                  <a:srgbClr val="121212"/>
+                </a:solidFill>
+                <a:latin typeface="Inter"/>
+              </a:rPr>
+              <a:t> </a:t>
+            </a:r>
+            <a:r>
+              <a:rPr lang="en-GB" sz="2400" dirty="0" err="1">
+                <a:solidFill>
+                  <a:srgbClr val="121212"/>
+                </a:solidFill>
+                <a:latin typeface="Inter"/>
+              </a:rPr>
+              <a:t>paigutada</a:t>
+            </a:r>
+            <a:endParaRPr lang="en-GB" dirty="0"/>
           </a:p>
         </p:txBody>
       </p:sp>
@@ -14484,7 +15434,7 @@
         </p:nvSpPr>
         <p:spPr>
           <a:xfrm>
-            <a:off x="365760" y="2468880"/>
+            <a:off x="365760" y="2560320"/>
             <a:ext cx="11430000" cy="1207008"/>
           </a:xfrm>
           <a:prstGeom prst="roundRect">
@@ -17594,7 +18544,7 @@
         </p:blipFill>
         <p:spPr>
           <a:xfrm>
-            <a:off x="10474611" y="2055690"/>
+            <a:off x="9389428" y="1682496"/>
             <a:ext cx="447737" cy="581106"/>
           </a:xfrm>
           <a:prstGeom prst="rect">
@@ -17627,51 +18577,6 @@
           <a:chExt cx="0" cy="0"/>
         </a:xfrm>
       </p:grpSpPr>
-      <p:sp>
-        <p:nvSpPr>
-          <p:cNvPr id="2" name="Rectangle 1"/>
-          <p:cNvSpPr/>
-          <p:nvPr/>
-        </p:nvSpPr>
-        <p:spPr>
-          <a:xfrm>
-            <a:off x="0" y="0"/>
-            <a:ext cx="12191695" cy="6858000"/>
-          </a:xfrm>
-          <a:prstGeom prst="rect">
-            <a:avLst/>
-          </a:prstGeom>
-          <a:solidFill>
-            <a:srgbClr val="F7F9FC"/>
-          </a:solidFill>
-          <a:ln>
-            <a:noFill/>
-          </a:ln>
-          <a:effectLst/>
-        </p:spPr>
-        <p:style>
-          <a:lnRef idx="1">
-            <a:schemeClr val="accent1"/>
-          </a:lnRef>
-          <a:fillRef idx="3">
-            <a:schemeClr val="accent1"/>
-          </a:fillRef>
-          <a:effectRef idx="2">
-            <a:schemeClr val="accent1"/>
-          </a:effectRef>
-          <a:fontRef idx="minor">
-            <a:schemeClr val="lt1"/>
-          </a:fontRef>
-        </p:style>
-        <p:txBody>
-          <a:bodyPr rtlCol="0" anchor="ctr"/>
-          <a:lstStyle/>
-          <a:p>
-            <a:pPr algn="ctr"/>
-            <a:endParaRPr/>
-          </a:p>
-        </p:txBody>
-      </p:sp>
       <p:sp>
         <p:nvSpPr>
           <p:cNvPr id="3" name="Rectangle 2"/>
@@ -19611,7 +20516,7 @@
         </p:blipFill>
         <p:spPr>
           <a:xfrm>
-            <a:off x="3486812" y="6175114"/>
+            <a:off x="4899722" y="5863536"/>
             <a:ext cx="1687579" cy="692622"/>
           </a:xfrm>
           <a:prstGeom prst="rect">

--- a/Materjalid/Day15 Github/github-desktop-esitlus.pptx
+++ b/Materjalid/Day15 Github/github-desktop-esitlus.pptx
@@ -267,7 +267,7 @@
           <a:p>
             <a:fld id="{D6E941F6-9D8D-4A15-9C93-1C66F398C183}" type="datetimeFigureOut">
               <a:rPr lang="en-GB" smtClean="0"/>
-              <a:t>18/09/2026</a:t>
+              <a:t>02/10/2026</a:t>
             </a:fld>
             <a:endParaRPr lang="en-GB"/>
           </a:p>
@@ -1600,7 +1600,7 @@
           <a:p>
             <a:fld id="{5BCAD085-E8A6-8845-BD4E-CB4CCA059FC4}" type="datetimeFigureOut">
               <a:rPr lang="en-US" smtClean="0"/>
-              <a:t>9/18/2026</a:t>
+              <a:t>10/2/2026</a:t>
             </a:fld>
             <a:endParaRPr lang="en-US"/>
           </a:p>
@@ -1768,7 +1768,7 @@
           <a:p>
             <a:fld id="{5BCAD085-E8A6-8845-BD4E-CB4CCA059FC4}" type="datetimeFigureOut">
               <a:rPr lang="en-US" smtClean="0"/>
-              <a:t>9/18/2026</a:t>
+              <a:t>10/2/2026</a:t>
             </a:fld>
             <a:endParaRPr lang="en-US"/>
           </a:p>
@@ -1946,7 +1946,7 @@
           <a:p>
             <a:fld id="{5BCAD085-E8A6-8845-BD4E-CB4CCA059FC4}" type="datetimeFigureOut">
               <a:rPr lang="en-US" smtClean="0"/>
-              <a:t>9/18/2026</a:t>
+              <a:t>10/2/2026</a:t>
             </a:fld>
             <a:endParaRPr lang="en-US"/>
           </a:p>
@@ -2846,7 +2846,7 @@
           <a:p>
             <a:fld id="{5BCAD085-E8A6-8845-BD4E-CB4CCA059FC4}" type="datetimeFigureOut">
               <a:rPr lang="en-US" smtClean="0"/>
-              <a:t>9/18/2026</a:t>
+              <a:t>10/2/2026</a:t>
             </a:fld>
             <a:endParaRPr lang="en-US"/>
           </a:p>
@@ -3091,7 +3091,7 @@
           <a:p>
             <a:fld id="{5BCAD085-E8A6-8845-BD4E-CB4CCA059FC4}" type="datetimeFigureOut">
               <a:rPr lang="en-US" smtClean="0"/>
-              <a:t>9/18/2026</a:t>
+              <a:t>10/2/2026</a:t>
             </a:fld>
             <a:endParaRPr lang="en-US"/>
           </a:p>
@@ -3376,7 +3376,7 @@
           <a:p>
             <a:fld id="{5BCAD085-E8A6-8845-BD4E-CB4CCA059FC4}" type="datetimeFigureOut">
               <a:rPr lang="en-US" smtClean="0"/>
-              <a:t>9/18/2026</a:t>
+              <a:t>10/2/2026</a:t>
             </a:fld>
             <a:endParaRPr lang="en-US"/>
           </a:p>
@@ -3795,7 +3795,7 @@
           <a:p>
             <a:fld id="{5BCAD085-E8A6-8845-BD4E-CB4CCA059FC4}" type="datetimeFigureOut">
               <a:rPr lang="en-US" smtClean="0"/>
-              <a:t>9/18/2026</a:t>
+              <a:t>10/2/2026</a:t>
             </a:fld>
             <a:endParaRPr lang="en-US"/>
           </a:p>
@@ -3912,7 +3912,7 @@
           <a:p>
             <a:fld id="{5BCAD085-E8A6-8845-BD4E-CB4CCA059FC4}" type="datetimeFigureOut">
               <a:rPr lang="en-US" smtClean="0"/>
-              <a:t>9/18/2026</a:t>
+              <a:t>10/2/2026</a:t>
             </a:fld>
             <a:endParaRPr lang="en-US"/>
           </a:p>
@@ -4007,7 +4007,7 @@
           <a:p>
             <a:fld id="{5BCAD085-E8A6-8845-BD4E-CB4CCA059FC4}" type="datetimeFigureOut">
               <a:rPr lang="en-US" smtClean="0"/>
-              <a:t>9/18/2026</a:t>
+              <a:t>10/2/2026</a:t>
             </a:fld>
             <a:endParaRPr lang="en-US"/>
           </a:p>
@@ -4282,7 +4282,7 @@
           <a:p>
             <a:fld id="{5BCAD085-E8A6-8845-BD4E-CB4CCA059FC4}" type="datetimeFigureOut">
               <a:rPr lang="en-US" smtClean="0"/>
-              <a:t>9/18/2026</a:t>
+              <a:t>10/2/2026</a:t>
             </a:fld>
             <a:endParaRPr lang="en-US"/>
           </a:p>
@@ -4534,7 +4534,7 @@
           <a:p>
             <a:fld id="{5BCAD085-E8A6-8845-BD4E-CB4CCA059FC4}" type="datetimeFigureOut">
               <a:rPr lang="en-US" smtClean="0"/>
-              <a:t>9/18/2026</a:t>
+              <a:t>10/2/2026</a:t>
             </a:fld>
             <a:endParaRPr lang="en-US"/>
           </a:p>
@@ -4745,7 +4745,7 @@
           <a:p>
             <a:fld id="{5BCAD085-E8A6-8845-BD4E-CB4CCA059FC4}" type="datetimeFigureOut">
               <a:rPr lang="en-US" smtClean="0"/>
-              <a:t>9/18/2026</a:t>
+              <a:t>10/2/2026</a:t>
             </a:fld>
             <a:endParaRPr lang="en-US"/>
           </a:p>
@@ -4829,6 +4829,565 @@
           </a:p>
         </p:txBody>
       </p:sp>
+      <p:cxnSp>
+        <p:nvCxnSpPr>
+          <p:cNvPr id="7" name="Straight Connector 6">
+            <a:extLst>
+              <a:ext uri="{FF2B5EF4-FFF2-40B4-BE49-F238E27FC236}">
+                <a16:creationId xmlns:a16="http://schemas.microsoft.com/office/drawing/2014/main" id="{093D5A53-B372-F3BA-80CE-868B25C5113D}"/>
+              </a:ext>
+            </a:extLst>
+          </p:cNvPr>
+          <p:cNvCxnSpPr>
+            <a:cxnSpLocks/>
+          </p:cNvCxnSpPr>
+          <p:nvPr userDrawn="1"/>
+        </p:nvCxnSpPr>
+        <p:spPr>
+          <a:xfrm>
+            <a:off x="623888" y="6414621"/>
+            <a:ext cx="9529762" cy="0"/>
+          </a:xfrm>
+          <a:prstGeom prst="line">
+            <a:avLst/>
+          </a:prstGeom>
+          <a:ln w="38100">
+            <a:solidFill>
+              <a:schemeClr val="tx2"/>
+            </a:solidFill>
+          </a:ln>
+        </p:spPr>
+        <p:style>
+          <a:lnRef idx="1">
+            <a:schemeClr val="accent1"/>
+          </a:lnRef>
+          <a:fillRef idx="0">
+            <a:schemeClr val="accent1"/>
+          </a:fillRef>
+          <a:effectRef idx="0">
+            <a:schemeClr val="accent1"/>
+          </a:effectRef>
+          <a:fontRef idx="minor">
+            <a:schemeClr val="tx1"/>
+          </a:fontRef>
+        </p:style>
+      </p:cxnSp>
+      <p:grpSp>
+        <p:nvGrpSpPr>
+          <p:cNvPr id="8" name="Group 7">
+            <a:extLst>
+              <a:ext uri="{FF2B5EF4-FFF2-40B4-BE49-F238E27FC236}">
+                <a16:creationId xmlns:a16="http://schemas.microsoft.com/office/drawing/2014/main" id="{9A981B92-BF94-BC0B-F543-759BA3C8D709}"/>
+              </a:ext>
+            </a:extLst>
+          </p:cNvPr>
+          <p:cNvGrpSpPr/>
+          <p:nvPr userDrawn="1"/>
+        </p:nvGrpSpPr>
+        <p:grpSpPr>
+          <a:xfrm>
+            <a:off x="10757948" y="6254276"/>
+            <a:ext cx="809030" cy="319556"/>
+            <a:chOff x="10757948" y="6254276"/>
+            <a:chExt cx="809030" cy="319556"/>
+          </a:xfrm>
+        </p:grpSpPr>
+        <p:sp>
+          <p:nvSpPr>
+            <p:cNvPr id="9" name="Freeform: Shape 8">
+              <a:extLst>
+                <a:ext uri="{FF2B5EF4-FFF2-40B4-BE49-F238E27FC236}">
+                  <a16:creationId xmlns:a16="http://schemas.microsoft.com/office/drawing/2014/main" id="{0A7A7CB9-AAA9-42AA-3B54-1CE2E4B48489}"/>
+                </a:ext>
+              </a:extLst>
+            </p:cNvPr>
+            <p:cNvSpPr/>
+            <p:nvPr/>
+          </p:nvSpPr>
+          <p:spPr>
+            <a:xfrm>
+              <a:off x="10757948" y="6254276"/>
+              <a:ext cx="809030" cy="319556"/>
+            </a:xfrm>
+            <a:custGeom>
+              <a:avLst/>
+              <a:gdLst>
+                <a:gd name="connsiteX0" fmla="*/ 0 w 809030"/>
+                <a:gd name="connsiteY0" fmla="*/ 127987 h 319556"/>
+                <a:gd name="connsiteX1" fmla="*/ 192245 w 809030"/>
+                <a:gd name="connsiteY1" fmla="*/ 127987 h 319556"/>
+                <a:gd name="connsiteX2" fmla="*/ 282424 w 809030"/>
+                <a:gd name="connsiteY2" fmla="*/ 63993 h 319556"/>
+                <a:gd name="connsiteX3" fmla="*/ 0 w 809030"/>
+                <a:gd name="connsiteY3" fmla="*/ 63993 h 319556"/>
+                <a:gd name="connsiteX4" fmla="*/ 0 w 809030"/>
+                <a:gd name="connsiteY4" fmla="*/ 0 h 319556"/>
+                <a:gd name="connsiteX5" fmla="*/ 295806 w 809030"/>
+                <a:gd name="connsiteY5" fmla="*/ 0 h 319556"/>
+                <a:gd name="connsiteX6" fmla="*/ 384973 w 809030"/>
+                <a:gd name="connsiteY6" fmla="*/ 63993 h 319556"/>
+                <a:gd name="connsiteX7" fmla="*/ 424034 w 809030"/>
+                <a:gd name="connsiteY7" fmla="*/ 63993 h 319556"/>
+                <a:gd name="connsiteX8" fmla="*/ 513466 w 809030"/>
+                <a:gd name="connsiteY8" fmla="*/ 0 h 319556"/>
+                <a:gd name="connsiteX9" fmla="*/ 796420 w 809030"/>
+                <a:gd name="connsiteY9" fmla="*/ 265 h 319556"/>
+                <a:gd name="connsiteX10" fmla="*/ 796420 w 809030"/>
+                <a:gd name="connsiteY10" fmla="*/ 63993 h 319556"/>
+                <a:gd name="connsiteX11" fmla="*/ 602921 w 809030"/>
+                <a:gd name="connsiteY11" fmla="*/ 63993 h 319556"/>
+                <a:gd name="connsiteX12" fmla="*/ 602921 w 809030"/>
+                <a:gd name="connsiteY12" fmla="*/ 127697 h 319556"/>
+                <a:gd name="connsiteX13" fmla="*/ 719599 w 809030"/>
+                <a:gd name="connsiteY13" fmla="*/ 127697 h 319556"/>
+                <a:gd name="connsiteX14" fmla="*/ 809031 w 809030"/>
+                <a:gd name="connsiteY14" fmla="*/ 192197 h 319556"/>
+                <a:gd name="connsiteX15" fmla="*/ 602921 w 809030"/>
+                <a:gd name="connsiteY15" fmla="*/ 192197 h 319556"/>
+                <a:gd name="connsiteX16" fmla="*/ 602921 w 809030"/>
+                <a:gd name="connsiteY16" fmla="*/ 255708 h 319556"/>
+                <a:gd name="connsiteX17" fmla="*/ 808766 w 809030"/>
+                <a:gd name="connsiteY17" fmla="*/ 255563 h 319556"/>
+                <a:gd name="connsiteX18" fmla="*/ 808766 w 809030"/>
+                <a:gd name="connsiteY18" fmla="*/ 255563 h 319556"/>
+                <a:gd name="connsiteX19" fmla="*/ 719575 w 809030"/>
+                <a:gd name="connsiteY19" fmla="*/ 319557 h 319556"/>
+                <a:gd name="connsiteX20" fmla="*/ 436379 w 809030"/>
+                <a:gd name="connsiteY20" fmla="*/ 319557 h 319556"/>
+                <a:gd name="connsiteX21" fmla="*/ 436379 w 809030"/>
+                <a:gd name="connsiteY21" fmla="*/ 255708 h 319556"/>
+                <a:gd name="connsiteX22" fmla="*/ 384924 w 809030"/>
+                <a:gd name="connsiteY22" fmla="*/ 255708 h 319556"/>
+                <a:gd name="connsiteX23" fmla="*/ 295830 w 809030"/>
+                <a:gd name="connsiteY23" fmla="*/ 319557 h 319556"/>
+                <a:gd name="connsiteX24" fmla="*/ 0 w 809030"/>
+                <a:gd name="connsiteY24" fmla="*/ 319557 h 319556"/>
+                <a:gd name="connsiteX25" fmla="*/ 0 w 809030"/>
+                <a:gd name="connsiteY25" fmla="*/ 255563 h 319556"/>
+                <a:gd name="connsiteX26" fmla="*/ 272394 w 809030"/>
+                <a:gd name="connsiteY26" fmla="*/ 255563 h 319556"/>
+                <a:gd name="connsiteX27" fmla="*/ 192221 w 809030"/>
+                <a:gd name="connsiteY27" fmla="*/ 192197 h 319556"/>
+                <a:gd name="connsiteX28" fmla="*/ 0 w 809030"/>
+                <a:gd name="connsiteY28" fmla="*/ 192197 h 319556"/>
+                <a:gd name="connsiteX29" fmla="*/ 0 w 809030"/>
+                <a:gd name="connsiteY29" fmla="*/ 127987 h 319556"/>
+                <a:gd name="connsiteX30" fmla="*/ 513466 w 809030"/>
+                <a:gd name="connsiteY30" fmla="*/ 192197 h 319556"/>
+                <a:gd name="connsiteX31" fmla="*/ 424058 w 809030"/>
+                <a:gd name="connsiteY31" fmla="*/ 127842 h 319556"/>
+                <a:gd name="connsiteX32" fmla="*/ 384948 w 809030"/>
+                <a:gd name="connsiteY32" fmla="*/ 127842 h 319556"/>
+                <a:gd name="connsiteX33" fmla="*/ 366213 w 809030"/>
+                <a:gd name="connsiteY33" fmla="*/ 160321 h 319556"/>
+                <a:gd name="connsiteX34" fmla="*/ 384973 w 809030"/>
+                <a:gd name="connsiteY34" fmla="*/ 192197 h 319556"/>
+                <a:gd name="connsiteX35" fmla="*/ 513466 w 809030"/>
+                <a:gd name="connsiteY35" fmla="*/ 192197 h 319556"/>
+              </a:gdLst>
+              <a:ahLst/>
+              <a:cxnLst>
+                <a:cxn ang="0">
+                  <a:pos x="connsiteX0" y="connsiteY0"/>
+                </a:cxn>
+                <a:cxn ang="0">
+                  <a:pos x="connsiteX1" y="connsiteY1"/>
+                </a:cxn>
+                <a:cxn ang="0">
+                  <a:pos x="connsiteX2" y="connsiteY2"/>
+                </a:cxn>
+                <a:cxn ang="0">
+                  <a:pos x="connsiteX3" y="connsiteY3"/>
+                </a:cxn>
+                <a:cxn ang="0">
+                  <a:pos x="connsiteX4" y="connsiteY4"/>
+                </a:cxn>
+                <a:cxn ang="0">
+                  <a:pos x="connsiteX5" y="connsiteY5"/>
+                </a:cxn>
+                <a:cxn ang="0">
+                  <a:pos x="connsiteX6" y="connsiteY6"/>
+                </a:cxn>
+                <a:cxn ang="0">
+                  <a:pos x="connsiteX7" y="connsiteY7"/>
+                </a:cxn>
+                <a:cxn ang="0">
+                  <a:pos x="connsiteX8" y="connsiteY8"/>
+                </a:cxn>
+                <a:cxn ang="0">
+                  <a:pos x="connsiteX9" y="connsiteY9"/>
+                </a:cxn>
+                <a:cxn ang="0">
+                  <a:pos x="connsiteX10" y="connsiteY10"/>
+                </a:cxn>
+                <a:cxn ang="0">
+                  <a:pos x="connsiteX11" y="connsiteY11"/>
+                </a:cxn>
+                <a:cxn ang="0">
+                  <a:pos x="connsiteX12" y="connsiteY12"/>
+                </a:cxn>
+                <a:cxn ang="0">
+                  <a:pos x="connsiteX13" y="connsiteY13"/>
+                </a:cxn>
+                <a:cxn ang="0">
+                  <a:pos x="connsiteX14" y="connsiteY14"/>
+                </a:cxn>
+                <a:cxn ang="0">
+                  <a:pos x="connsiteX15" y="connsiteY15"/>
+                </a:cxn>
+                <a:cxn ang="0">
+                  <a:pos x="connsiteX16" y="connsiteY16"/>
+                </a:cxn>
+                <a:cxn ang="0">
+                  <a:pos x="connsiteX17" y="connsiteY17"/>
+                </a:cxn>
+                <a:cxn ang="0">
+                  <a:pos x="connsiteX18" y="connsiteY18"/>
+                </a:cxn>
+                <a:cxn ang="0">
+                  <a:pos x="connsiteX19" y="connsiteY19"/>
+                </a:cxn>
+                <a:cxn ang="0">
+                  <a:pos x="connsiteX20" y="connsiteY20"/>
+                </a:cxn>
+                <a:cxn ang="0">
+                  <a:pos x="connsiteX21" y="connsiteY21"/>
+                </a:cxn>
+                <a:cxn ang="0">
+                  <a:pos x="connsiteX22" y="connsiteY22"/>
+                </a:cxn>
+                <a:cxn ang="0">
+                  <a:pos x="connsiteX23" y="connsiteY23"/>
+                </a:cxn>
+                <a:cxn ang="0">
+                  <a:pos x="connsiteX24" y="connsiteY24"/>
+                </a:cxn>
+                <a:cxn ang="0">
+                  <a:pos x="connsiteX25" y="connsiteY25"/>
+                </a:cxn>
+                <a:cxn ang="0">
+                  <a:pos x="connsiteX26" y="connsiteY26"/>
+                </a:cxn>
+                <a:cxn ang="0">
+                  <a:pos x="connsiteX27" y="connsiteY27"/>
+                </a:cxn>
+                <a:cxn ang="0">
+                  <a:pos x="connsiteX28" y="connsiteY28"/>
+                </a:cxn>
+                <a:cxn ang="0">
+                  <a:pos x="connsiteX29" y="connsiteY29"/>
+                </a:cxn>
+                <a:cxn ang="0">
+                  <a:pos x="connsiteX30" y="connsiteY30"/>
+                </a:cxn>
+                <a:cxn ang="0">
+                  <a:pos x="connsiteX31" y="connsiteY31"/>
+                </a:cxn>
+                <a:cxn ang="0">
+                  <a:pos x="connsiteX32" y="connsiteY32"/>
+                </a:cxn>
+                <a:cxn ang="0">
+                  <a:pos x="connsiteX33" y="connsiteY33"/>
+                </a:cxn>
+                <a:cxn ang="0">
+                  <a:pos x="connsiteX34" y="connsiteY34"/>
+                </a:cxn>
+                <a:cxn ang="0">
+                  <a:pos x="connsiteX35" y="connsiteY35"/>
+                </a:cxn>
+              </a:cxnLst>
+              <a:rect l="l" t="t" r="r" b="b"/>
+              <a:pathLst>
+                <a:path w="809030" h="319556">
+                  <a:moveTo>
+                    <a:pt x="0" y="127987"/>
+                  </a:moveTo>
+                  <a:lnTo>
+                    <a:pt x="192245" y="127987"/>
+                  </a:lnTo>
+                  <a:cubicBezTo>
+                    <a:pt x="193210" y="123405"/>
+                    <a:pt x="207074" y="63993"/>
+                    <a:pt x="282424" y="63993"/>
+                  </a:cubicBezTo>
+                  <a:lnTo>
+                    <a:pt x="0" y="63993"/>
+                  </a:lnTo>
+                  <a:lnTo>
+                    <a:pt x="0" y="0"/>
+                  </a:lnTo>
+                  <a:lnTo>
+                    <a:pt x="295806" y="0"/>
+                  </a:lnTo>
+                  <a:cubicBezTo>
+                    <a:pt x="374195" y="0"/>
+                    <a:pt x="384973" y="63993"/>
+                    <a:pt x="384973" y="63993"/>
+                  </a:cubicBezTo>
+                  <a:lnTo>
+                    <a:pt x="424034" y="63993"/>
+                  </a:lnTo>
+                  <a:cubicBezTo>
+                    <a:pt x="424034" y="63993"/>
+                    <a:pt x="435077" y="0"/>
+                    <a:pt x="513466" y="0"/>
+                  </a:cubicBezTo>
+                  <a:cubicBezTo>
+                    <a:pt x="591854" y="0"/>
+                    <a:pt x="796420" y="265"/>
+                    <a:pt x="796420" y="265"/>
+                  </a:cubicBezTo>
+                  <a:lnTo>
+                    <a:pt x="796420" y="63993"/>
+                  </a:lnTo>
+                  <a:lnTo>
+                    <a:pt x="602921" y="63993"/>
+                  </a:lnTo>
+                  <a:lnTo>
+                    <a:pt x="602921" y="127697"/>
+                  </a:lnTo>
+                  <a:lnTo>
+                    <a:pt x="719599" y="127697"/>
+                  </a:lnTo>
+                  <a:cubicBezTo>
+                    <a:pt x="797987" y="127697"/>
+                    <a:pt x="809031" y="192197"/>
+                    <a:pt x="809031" y="192197"/>
+                  </a:cubicBezTo>
+                  <a:lnTo>
+                    <a:pt x="602921" y="192197"/>
+                  </a:lnTo>
+                  <a:lnTo>
+                    <a:pt x="602921" y="255708"/>
+                  </a:lnTo>
+                  <a:lnTo>
+                    <a:pt x="808766" y="255563"/>
+                  </a:lnTo>
+                  <a:lnTo>
+                    <a:pt x="808766" y="255563"/>
+                  </a:lnTo>
+                  <a:cubicBezTo>
+                    <a:pt x="808766" y="255563"/>
+                    <a:pt x="797963" y="319557"/>
+                    <a:pt x="719575" y="319557"/>
+                  </a:cubicBezTo>
+                  <a:lnTo>
+                    <a:pt x="436379" y="319557"/>
+                  </a:lnTo>
+                  <a:lnTo>
+                    <a:pt x="436379" y="255708"/>
+                  </a:lnTo>
+                  <a:lnTo>
+                    <a:pt x="384924" y="255708"/>
+                  </a:lnTo>
+                  <a:cubicBezTo>
+                    <a:pt x="383912" y="260868"/>
+                    <a:pt x="370746" y="319557"/>
+                    <a:pt x="295830" y="319557"/>
+                  </a:cubicBezTo>
+                  <a:lnTo>
+                    <a:pt x="0" y="319557"/>
+                  </a:lnTo>
+                  <a:lnTo>
+                    <a:pt x="0" y="255563"/>
+                  </a:lnTo>
+                  <a:lnTo>
+                    <a:pt x="272394" y="255563"/>
+                  </a:lnTo>
+                  <a:cubicBezTo>
+                    <a:pt x="203023" y="250403"/>
+                    <a:pt x="192221" y="192197"/>
+                    <a:pt x="192221" y="192197"/>
+                  </a:cubicBezTo>
+                  <a:lnTo>
+                    <a:pt x="0" y="192197"/>
+                  </a:lnTo>
+                  <a:lnTo>
+                    <a:pt x="0" y="127987"/>
+                  </a:lnTo>
+                  <a:close/>
+                  <a:moveTo>
+                    <a:pt x="513466" y="192197"/>
+                  </a:moveTo>
+                  <a:cubicBezTo>
+                    <a:pt x="438477" y="192197"/>
+                    <a:pt x="424757" y="131169"/>
+                    <a:pt x="424058" y="127842"/>
+                  </a:cubicBezTo>
+                  <a:lnTo>
+                    <a:pt x="384948" y="127842"/>
+                  </a:lnTo>
+                  <a:cubicBezTo>
+                    <a:pt x="384707" y="129699"/>
+                    <a:pt x="382176" y="145805"/>
+                    <a:pt x="366213" y="160321"/>
+                  </a:cubicBezTo>
+                  <a:cubicBezTo>
+                    <a:pt x="384973" y="176259"/>
+                    <a:pt x="384973" y="192197"/>
+                    <a:pt x="384973" y="192197"/>
+                  </a:cubicBezTo>
+                  <a:lnTo>
+                    <a:pt x="513466" y="192197"/>
+                  </a:lnTo>
+                  <a:close/>
+                </a:path>
+              </a:pathLst>
+            </a:custGeom>
+            <a:solidFill>
+              <a:schemeClr val="tx2"/>
+            </a:solidFill>
+            <a:ln w="2410" cap="flat">
+              <a:noFill/>
+              <a:prstDash val="solid"/>
+              <a:miter/>
+            </a:ln>
+          </p:spPr>
+          <p:txBody>
+            <a:bodyPr rtlCol="0" anchor="ctr"/>
+            <a:lstStyle/>
+            <a:p>
+              <a:endParaRPr lang="en-US"/>
+            </a:p>
+          </p:txBody>
+        </p:sp>
+        <p:sp>
+          <p:nvSpPr>
+            <p:cNvPr id="10" name="Freeform: Shape 9">
+              <a:extLst>
+                <a:ext uri="{FF2B5EF4-FFF2-40B4-BE49-F238E27FC236}">
+                  <a16:creationId xmlns:a16="http://schemas.microsoft.com/office/drawing/2014/main" id="{0F1B44DF-2388-62C9-4D10-906C6024D94A}"/>
+                </a:ext>
+              </a:extLst>
+            </p:cNvPr>
+            <p:cNvSpPr/>
+            <p:nvPr/>
+          </p:nvSpPr>
+          <p:spPr>
+            <a:xfrm>
+              <a:off x="10950193" y="6318269"/>
+              <a:ext cx="410675" cy="191714"/>
+            </a:xfrm>
+            <a:custGeom>
+              <a:avLst/>
+              <a:gdLst>
+                <a:gd name="connsiteX0" fmla="*/ 410676 w 410675"/>
+                <a:gd name="connsiteY0" fmla="*/ 0 h 191714"/>
+                <a:gd name="connsiteX1" fmla="*/ 90203 w 410675"/>
+                <a:gd name="connsiteY1" fmla="*/ 0 h 191714"/>
+                <a:gd name="connsiteX2" fmla="*/ 0 w 410675"/>
+                <a:gd name="connsiteY2" fmla="*/ 63993 h 191714"/>
+                <a:gd name="connsiteX3" fmla="*/ 410676 w 410675"/>
+                <a:gd name="connsiteY3" fmla="*/ 63752 h 191714"/>
+                <a:gd name="connsiteX4" fmla="*/ 410676 w 410675"/>
+                <a:gd name="connsiteY4" fmla="*/ 0 h 191714"/>
+                <a:gd name="connsiteX5" fmla="*/ 410676 w 410675"/>
+                <a:gd name="connsiteY5" fmla="*/ 191715 h 191714"/>
+                <a:gd name="connsiteX6" fmla="*/ 87647 w 410675"/>
+                <a:gd name="connsiteY6" fmla="*/ 191715 h 191714"/>
+                <a:gd name="connsiteX7" fmla="*/ 0 w 410675"/>
+                <a:gd name="connsiteY7" fmla="*/ 128204 h 191714"/>
+                <a:gd name="connsiteX8" fmla="*/ 410676 w 410675"/>
+                <a:gd name="connsiteY8" fmla="*/ 128204 h 191714"/>
+                <a:gd name="connsiteX9" fmla="*/ 410676 w 410675"/>
+                <a:gd name="connsiteY9" fmla="*/ 191715 h 191714"/>
+              </a:gdLst>
+              <a:ahLst/>
+              <a:cxnLst>
+                <a:cxn ang="0">
+                  <a:pos x="connsiteX0" y="connsiteY0"/>
+                </a:cxn>
+                <a:cxn ang="0">
+                  <a:pos x="connsiteX1" y="connsiteY1"/>
+                </a:cxn>
+                <a:cxn ang="0">
+                  <a:pos x="connsiteX2" y="connsiteY2"/>
+                </a:cxn>
+                <a:cxn ang="0">
+                  <a:pos x="connsiteX3" y="connsiteY3"/>
+                </a:cxn>
+                <a:cxn ang="0">
+                  <a:pos x="connsiteX4" y="connsiteY4"/>
+                </a:cxn>
+                <a:cxn ang="0">
+                  <a:pos x="connsiteX5" y="connsiteY5"/>
+                </a:cxn>
+                <a:cxn ang="0">
+                  <a:pos x="connsiteX6" y="connsiteY6"/>
+                </a:cxn>
+                <a:cxn ang="0">
+                  <a:pos x="connsiteX7" y="connsiteY7"/>
+                </a:cxn>
+                <a:cxn ang="0">
+                  <a:pos x="connsiteX8" y="connsiteY8"/>
+                </a:cxn>
+                <a:cxn ang="0">
+                  <a:pos x="connsiteX9" y="connsiteY9"/>
+                </a:cxn>
+              </a:cxnLst>
+              <a:rect l="l" t="t" r="r" b="b"/>
+              <a:pathLst>
+                <a:path w="410675" h="191714">
+                  <a:moveTo>
+                    <a:pt x="410676" y="0"/>
+                  </a:moveTo>
+                  <a:lnTo>
+                    <a:pt x="90203" y="0"/>
+                  </a:lnTo>
+                  <a:cubicBezTo>
+                    <a:pt x="11815" y="0"/>
+                    <a:pt x="0" y="63993"/>
+                    <a:pt x="0" y="63993"/>
+                  </a:cubicBezTo>
+                  <a:lnTo>
+                    <a:pt x="410676" y="63752"/>
+                  </a:lnTo>
+                  <a:lnTo>
+                    <a:pt x="410676" y="0"/>
+                  </a:lnTo>
+                  <a:close/>
+                  <a:moveTo>
+                    <a:pt x="410676" y="191715"/>
+                  </a:moveTo>
+                  <a:lnTo>
+                    <a:pt x="87647" y="191715"/>
+                  </a:lnTo>
+                  <a:cubicBezTo>
+                    <a:pt x="9789" y="191715"/>
+                    <a:pt x="121" y="125937"/>
+                    <a:pt x="0" y="128204"/>
+                  </a:cubicBezTo>
+                  <a:lnTo>
+                    <a:pt x="410676" y="128204"/>
+                  </a:lnTo>
+                  <a:lnTo>
+                    <a:pt x="410676" y="191715"/>
+                  </a:lnTo>
+                  <a:close/>
+                </a:path>
+              </a:pathLst>
+            </a:custGeom>
+            <a:solidFill>
+              <a:schemeClr val="tx2">
+                <a:lumMod val="60000"/>
+                <a:lumOff val="40000"/>
+              </a:schemeClr>
+            </a:solidFill>
+            <a:ln w="2410" cap="flat">
+              <a:noFill/>
+              <a:prstDash val="solid"/>
+              <a:miter/>
+            </a:ln>
+          </p:spPr>
+          <p:txBody>
+            <a:bodyPr rtlCol="0" anchor="ctr"/>
+            <a:lstStyle/>
+            <a:p>
+              <a:endParaRPr lang="en-US"/>
+            </a:p>
+          </p:txBody>
+        </p:sp>
+      </p:grpSp>
     </p:spTree>
     <p:extLst>
       <p:ext uri="{BB962C8B-B14F-4D97-AF65-F5344CB8AC3E}">
